--- a/presentation/scott-shasta-presentation-final.pptx
+++ b/presentation/scott-shasta-presentation-final.pptx
@@ -11,6 +11,7 @@
     <p:sldId id="261" r:id="rId5"/>
     <p:sldId id="262" r:id="rId6"/>
     <p:sldId id="263" r:id="rId7"/>
+    <p:sldId id="264" r:id="rId8"/>
   </p:sldIdLst>
   <p:sldSz cx="9144000" cy="5143500" type="screen16x9"/>
   <p:notesSz cx="6858000" cy="9144000"/>
@@ -126,6 +127,111 @@
     </p:ext>
   </p:extLst>
 </p:presentation>
+</file>
+
+<file path=ppt/revisionInfo.xml><?xml version="1.0" encoding="utf-8"?>
+<p1510:revInfo xmlns:a="http://schemas.openxmlformats.org/drawingml/2006/main" xmlns:r="http://schemas.openxmlformats.org/officeDocument/2006/relationships" xmlns:p1510="http://schemas.microsoft.com/office/powerpoint/2015/10/main">
+  <p1510:revLst>
+    <p1510:client id="{F58AAF76-1AF5-4F98-BA1A-96DDAD2B32F6}" v="77" dt="2025-06-25T16:09:30"/>
+  </p1510:revLst>
+</p1510:revInfo>
+</file>
+
+<file path=ppt/changesInfos/changesInfo1.xml><?xml version="1.0" encoding="utf-8"?>
+<pc:chgInfo xmlns:a="http://schemas.openxmlformats.org/drawingml/2006/main" xmlns:r="http://schemas.openxmlformats.org/officeDocument/2006/relationships" xmlns:ac="http://schemas.microsoft.com/office/drawing/2013/main/command" xmlns:pc="http://schemas.microsoft.com/office/powerpoint/2013/main/command">
+  <pc:docChgLst>
+    <pc:chgData name="Yeazell, Jeffrey@Waterboards" userId="77c35632-eb28-46fb-9331-887dc90c6b94" providerId="ADAL" clId="{F58AAF76-1AF5-4F98-BA1A-96DDAD2B32F6}"/>
+    <pc:docChg chg="custSel addSld delSld modSld">
+      <pc:chgData name="Yeazell, Jeffrey@Waterboards" userId="77c35632-eb28-46fb-9331-887dc90c6b94" providerId="ADAL" clId="{F58AAF76-1AF5-4F98-BA1A-96DDAD2B32F6}" dt="2025-06-25T16:15:05.598" v="119" actId="478"/>
+      <pc:docMkLst>
+        <pc:docMk/>
+      </pc:docMkLst>
+      <pc:sldChg chg="modSp mod">
+        <pc:chgData name="Yeazell, Jeffrey@Waterboards" userId="77c35632-eb28-46fb-9331-887dc90c6b94" providerId="ADAL" clId="{F58AAF76-1AF5-4F98-BA1A-96DDAD2B32F6}" dt="2025-06-25T16:04:36.982" v="8" actId="20577"/>
+        <pc:sldMkLst>
+          <pc:docMk/>
+          <pc:sldMk cId="0" sldId="259"/>
+        </pc:sldMkLst>
+        <pc:spChg chg="mod">
+          <ac:chgData name="Yeazell, Jeffrey@Waterboards" userId="77c35632-eb28-46fb-9331-887dc90c6b94" providerId="ADAL" clId="{F58AAF76-1AF5-4F98-BA1A-96DDAD2B32F6}" dt="2025-06-25T16:04:36.982" v="8" actId="20577"/>
+          <ac:spMkLst>
+            <pc:docMk/>
+            <pc:sldMk cId="0" sldId="259"/>
+            <ac:spMk id="2" creationId="{00000000-0000-0000-0000-000000000000}"/>
+          </ac:spMkLst>
+        </pc:spChg>
+      </pc:sldChg>
+      <pc:sldChg chg="modSp">
+        <pc:chgData name="Yeazell, Jeffrey@Waterboards" userId="77c35632-eb28-46fb-9331-887dc90c6b94" providerId="ADAL" clId="{F58AAF76-1AF5-4F98-BA1A-96DDAD2B32F6}" dt="2025-06-25T16:06:13.240" v="36" actId="20577"/>
+        <pc:sldMkLst>
+          <pc:docMk/>
+          <pc:sldMk cId="0" sldId="261"/>
+        </pc:sldMkLst>
+        <pc:graphicFrameChg chg="mod">
+          <ac:chgData name="Yeazell, Jeffrey@Waterboards" userId="77c35632-eb28-46fb-9331-887dc90c6b94" providerId="ADAL" clId="{F58AAF76-1AF5-4F98-BA1A-96DDAD2B32F6}" dt="2025-06-25T16:06:13.240" v="36" actId="20577"/>
+          <ac:graphicFrameMkLst>
+            <pc:docMk/>
+            <pc:sldMk cId="0" sldId="261"/>
+            <ac:graphicFrameMk id="5" creationId="{FAE3D5EC-6588-0D45-D816-3C63A7E5F480}"/>
+          </ac:graphicFrameMkLst>
+        </pc:graphicFrameChg>
+      </pc:sldChg>
+      <pc:sldChg chg="modSp">
+        <pc:chgData name="Yeazell, Jeffrey@Waterboards" userId="77c35632-eb28-46fb-9331-887dc90c6b94" providerId="ADAL" clId="{F58AAF76-1AF5-4F98-BA1A-96DDAD2B32F6}" dt="2025-06-25T16:09:30" v="85" actId="20577"/>
+        <pc:sldMkLst>
+          <pc:docMk/>
+          <pc:sldMk cId="0" sldId="262"/>
+        </pc:sldMkLst>
+        <pc:graphicFrameChg chg="mod">
+          <ac:chgData name="Yeazell, Jeffrey@Waterboards" userId="77c35632-eb28-46fb-9331-887dc90c6b94" providerId="ADAL" clId="{F58AAF76-1AF5-4F98-BA1A-96DDAD2B32F6}" dt="2025-06-25T16:09:30" v="85" actId="20577"/>
+          <ac:graphicFrameMkLst>
+            <pc:docMk/>
+            <pc:sldMk cId="0" sldId="262"/>
+            <ac:graphicFrameMk id="5" creationId="{2E500868-2C6A-AF15-90DF-D0092C82C321}"/>
+          </ac:graphicFrameMkLst>
+        </pc:graphicFrameChg>
+      </pc:sldChg>
+      <pc:sldChg chg="modSp new del mod">
+        <pc:chgData name="Yeazell, Jeffrey@Waterboards" userId="77c35632-eb28-46fb-9331-887dc90c6b94" providerId="ADAL" clId="{F58AAF76-1AF5-4F98-BA1A-96DDAD2B32F6}" dt="2025-06-25T16:14:08.347" v="99" actId="2696"/>
+        <pc:sldMkLst>
+          <pc:docMk/>
+          <pc:sldMk cId="2197222352" sldId="264"/>
+        </pc:sldMkLst>
+        <pc:spChg chg="mod">
+          <ac:chgData name="Yeazell, Jeffrey@Waterboards" userId="77c35632-eb28-46fb-9331-887dc90c6b94" providerId="ADAL" clId="{F58AAF76-1AF5-4F98-BA1A-96DDAD2B32F6}" dt="2025-06-25T16:13:35.814" v="98" actId="20577"/>
+          <ac:spMkLst>
+            <pc:docMk/>
+            <pc:sldMk cId="2197222352" sldId="264"/>
+            <ac:spMk id="2" creationId="{4CE47C4E-B34D-D3FF-B9B2-96400C50B7FD}"/>
+          </ac:spMkLst>
+        </pc:spChg>
+      </pc:sldChg>
+      <pc:sldChg chg="delSp modSp add mod">
+        <pc:chgData name="Yeazell, Jeffrey@Waterboards" userId="77c35632-eb28-46fb-9331-887dc90c6b94" providerId="ADAL" clId="{F58AAF76-1AF5-4F98-BA1A-96DDAD2B32F6}" dt="2025-06-25T16:15:05.598" v="119" actId="478"/>
+        <pc:sldMkLst>
+          <pc:docMk/>
+          <pc:sldMk cId="4049966355" sldId="264"/>
+        </pc:sldMkLst>
+        <pc:spChg chg="mod">
+          <ac:chgData name="Yeazell, Jeffrey@Waterboards" userId="77c35632-eb28-46fb-9331-887dc90c6b94" providerId="ADAL" clId="{F58AAF76-1AF5-4F98-BA1A-96DDAD2B32F6}" dt="2025-06-25T16:14:32.842" v="117" actId="20577"/>
+          <ac:spMkLst>
+            <pc:docMk/>
+            <pc:sldMk cId="4049966355" sldId="264"/>
+            <ac:spMk id="2" creationId="{6701D9D7-AB6D-C769-5F02-902E38A17CF6}"/>
+          </ac:spMkLst>
+        </pc:spChg>
+        <pc:spChg chg="del mod">
+          <ac:chgData name="Yeazell, Jeffrey@Waterboards" userId="77c35632-eb28-46fb-9331-887dc90c6b94" providerId="ADAL" clId="{F58AAF76-1AF5-4F98-BA1A-96DDAD2B32F6}" dt="2025-06-25T16:15:05.598" v="119" actId="478"/>
+          <ac:spMkLst>
+            <pc:docMk/>
+            <pc:sldMk cId="4049966355" sldId="264"/>
+            <ac:spMk id="3" creationId="{0A10731B-283A-1AD2-2C6B-7B2A087D5F14}"/>
+          </ac:spMkLst>
+        </pc:spChg>
+      </pc:sldChg>
+    </pc:docChg>
+  </pc:docChgLst>
+</pc:chgInfo>
 </file>
 
 <file path=ppt/diagrams/colors1.xml><?xml version="1.0" encoding="utf-8"?>
@@ -3514,9 +3620,9 @@
     <dgm:cxn modelId="{F3EC7907-0837-3C40-BBBF-EF4C9C750FC9}" type="presOf" srcId="{DC11989D-4604-4F83-9D56-B44EF84C6B45}" destId="{19A1D243-C7BB-AA47-87FA-0456B974F1F0}" srcOrd="0" destOrd="0" presId="urn:microsoft.com/office/officeart/2016/7/layout/BasicLinearProcessNumbered"/>
     <dgm:cxn modelId="{0762A81D-B47C-C849-B7C8-3B997FD2DAE5}" type="presOf" srcId="{A301882F-7311-4AC9-8388-F9C7185D5173}" destId="{A1D1C971-A419-034A-A3F5-683E273760D5}" srcOrd="0" destOrd="0" presId="urn:microsoft.com/office/officeart/2016/7/layout/BasicLinearProcessNumbered"/>
     <dgm:cxn modelId="{86146221-46A2-864A-A057-B75374633BA9}" type="presOf" srcId="{9707740C-F185-402E-B5D3-54C3C08E98A3}" destId="{2AB9C63F-F6B7-3642-A604-EE0CBA3A1198}" srcOrd="0" destOrd="0" presId="urn:microsoft.com/office/officeart/2016/7/layout/BasicLinearProcessNumbered"/>
-    <dgm:cxn modelId="{6116F443-28E8-C047-8B44-799D3FC1661A}" type="presOf" srcId="{76873009-1ECE-476F-AB9D-59BBBFC4370E}" destId="{C2D2A70A-A559-4845-9CA9-946AD274FA5F}" srcOrd="1" destOrd="0" presId="urn:microsoft.com/office/officeart/2016/7/layout/BasicLinearProcessNumbered"/>
     <dgm:cxn modelId="{E351C25E-8CDE-4C4F-B176-125FF7962123}" type="presOf" srcId="{76873009-1ECE-476F-AB9D-59BBBFC4370E}" destId="{11FCA7D9-3020-7D47-8A92-D98D459D1310}" srcOrd="0" destOrd="0" presId="urn:microsoft.com/office/officeart/2016/7/layout/BasicLinearProcessNumbered"/>
     <dgm:cxn modelId="{C188BF63-FED7-4883-8F69-592807DAC06D}" srcId="{90C57F78-32D2-451B-9E1D-79A1E1010940}" destId="{76873009-1ECE-476F-AB9D-59BBBFC4370E}" srcOrd="2" destOrd="0" parTransId="{608233CF-EAE6-448C-AA4E-ECD8EF5B900B}" sibTransId="{2E974CA0-3895-4A36-86AE-A55E75943316}"/>
+    <dgm:cxn modelId="{6116F443-28E8-C047-8B44-799D3FC1661A}" type="presOf" srcId="{76873009-1ECE-476F-AB9D-59BBBFC4370E}" destId="{C2D2A70A-A559-4845-9CA9-946AD274FA5F}" srcOrd="1" destOrd="0" presId="urn:microsoft.com/office/officeart/2016/7/layout/BasicLinearProcessNumbered"/>
     <dgm:cxn modelId="{C1895073-C879-E040-BC78-FADEB4E5DB19}" type="presOf" srcId="{90C57F78-32D2-451B-9E1D-79A1E1010940}" destId="{18C9058D-BB83-C344-9D9C-C0C5459B5548}" srcOrd="0" destOrd="0" presId="urn:microsoft.com/office/officeart/2016/7/layout/BasicLinearProcessNumbered"/>
     <dgm:cxn modelId="{E76D8D7A-0594-4090-AC28-13E2817496AA}" srcId="{90C57F78-32D2-451B-9E1D-79A1E1010940}" destId="{9707740C-F185-402E-B5D3-54C3C08E98A3}" srcOrd="1" destOrd="0" parTransId="{7B5CADD5-230C-4594-B5E7-403FA9AD5058}" sibTransId="{7F800790-5179-421F-B770-B3FD19CC094A}"/>
     <dgm:cxn modelId="{8FB6E5A7-6799-4A4C-8C4B-146049674142}" type="presOf" srcId="{DC11989D-4604-4F83-9D56-B44EF84C6B45}" destId="{60BA85D8-9481-7144-9752-C02E0D00548D}" srcOrd="1" destOrd="0" presId="urn:microsoft.com/office/officeart/2016/7/layout/BasicLinearProcessNumbered"/>
@@ -3809,7 +3915,7 @@
 <dgm:dataModel xmlns:dgm="http://schemas.openxmlformats.org/drawingml/2006/diagram" xmlns:a="http://schemas.openxmlformats.org/drawingml/2006/main">
   <dgm:ptLst>
     <dgm:pt modelId="{D5A08B58-53E1-42E8-9664-B9C3420A36AD}" type="doc">
-      <dgm:prSet loTypeId="urn:microsoft.com/office/officeart/2005/8/layout/vList2" loCatId="list" qsTypeId="urn:microsoft.com/office/officeart/2005/8/quickstyle/simple1" qsCatId="simple" csTypeId="urn:microsoft.com/office/officeart/2005/8/colors/colorful2" csCatId="colorful"/>
+      <dgm:prSet loTypeId="urn:microsoft.com/office/officeart/2005/8/layout/vList2" loCatId="list" qsTypeId="urn:microsoft.com/office/officeart/2005/8/quickstyle/simple1" qsCatId="simple" csTypeId="urn:microsoft.com/office/officeart/2005/8/colors/colorful2" csCatId="colorful" phldr="1"/>
       <dgm:spPr/>
       <dgm:t>
         <a:bodyPr/>
@@ -3951,7 +4057,7 @@
         <a:lstStyle/>
         <a:p>
           <a:r>
-            <a:rPr lang="en-US"/>
+            <a:rPr lang="en-US" dirty="0"/>
             <a:t>Clickable CDEC station links</a:t>
           </a:r>
         </a:p>
@@ -4023,8 +4129,8 @@
         <a:lstStyle/>
         <a:p>
           <a:r>
-            <a:rPr lang="en-US"/>
-            <a:t>Mobile and desktop optimized</a:t>
+            <a:rPr lang="en-US" dirty="0"/>
+            <a:t>Desktop and mobile optimized</a:t>
           </a:r>
         </a:p>
       </dgm:t>
@@ -4104,10 +4210,10 @@
     <dgm:cxn modelId="{34992809-EBEF-4C24-9A7C-88D5A10D8C77}" srcId="{3DF9A0E9-B523-4358-A305-0503A079C29C}" destId="{EE09A054-21A1-44C1-AA3C-ED033B2420A0}" srcOrd="1" destOrd="0" parTransId="{7CCEC0AD-F433-441D-883C-47961BD74E10}" sibTransId="{0F100F41-63C2-4D4B-B8C8-22E4CAEF200E}"/>
     <dgm:cxn modelId="{FC92A40F-B461-0440-9B8F-1988D2396B07}" type="presOf" srcId="{10BF5995-1A99-4778-9A91-0BDC3A826C34}" destId="{B91CCC38-5DF1-254F-999A-29C9D656A457}" srcOrd="0" destOrd="0" presId="urn:microsoft.com/office/officeart/2005/8/layout/vList2"/>
     <dgm:cxn modelId="{E7B9C411-3051-9B41-BFED-3A41F06411ED}" type="presOf" srcId="{5FFA7AA0-9EDB-4BA5-8BC8-A4D80815944D}" destId="{45AB22EF-A779-E748-A398-3398C94A2D1B}" srcOrd="0" destOrd="0" presId="urn:microsoft.com/office/officeart/2005/8/layout/vList2"/>
+    <dgm:cxn modelId="{6169CD67-B7BF-9C4D-82DE-232CFB7078F1}" type="presOf" srcId="{6D259E67-E736-4299-874C-2E4B44110CBB}" destId="{45AB22EF-A779-E748-A398-3398C94A2D1B}" srcOrd="0" destOrd="2" presId="urn:microsoft.com/office/officeart/2005/8/layout/vList2"/>
+    <dgm:cxn modelId="{A0B7B472-172D-4B40-93CD-A7613F673E32}" type="presOf" srcId="{3DF9A0E9-B523-4358-A305-0503A079C29C}" destId="{A3D1242B-E700-B643-8E36-177E9FD6B317}" srcOrd="0" destOrd="0" presId="urn:microsoft.com/office/officeart/2005/8/layout/vList2"/>
     <dgm:cxn modelId="{EB5CAD53-236C-AB42-A95F-6D06B01AC46E}" type="presOf" srcId="{D5A08B58-53E1-42E8-9664-B9C3420A36AD}" destId="{A92B7CDA-DE2B-9245-BC49-00B1AD9C6C38}" srcOrd="0" destOrd="0" presId="urn:microsoft.com/office/officeart/2005/8/layout/vList2"/>
     <dgm:cxn modelId="{2B1E4A59-CD40-4622-B76F-6B091BF53CD8}" srcId="{D5A08B58-53E1-42E8-9664-B9C3420A36AD}" destId="{5C9988A6-494D-4CC2-A8F5-CB4F6F08CD01}" srcOrd="0" destOrd="0" parTransId="{7559263F-06D1-4595-BF52-3085C8452B1C}" sibTransId="{B40D48C6-3ACF-46AA-ADB1-D8DFC02C70A4}"/>
-    <dgm:cxn modelId="{6169CD67-B7BF-9C4D-82DE-232CFB7078F1}" type="presOf" srcId="{6D259E67-E736-4299-874C-2E4B44110CBB}" destId="{45AB22EF-A779-E748-A398-3398C94A2D1B}" srcOrd="0" destOrd="2" presId="urn:microsoft.com/office/officeart/2005/8/layout/vList2"/>
-    <dgm:cxn modelId="{A0B7B472-172D-4B40-93CD-A7613F673E32}" type="presOf" srcId="{3DF9A0E9-B523-4358-A305-0503A079C29C}" destId="{A3D1242B-E700-B643-8E36-177E9FD6B317}" srcOrd="0" destOrd="0" presId="urn:microsoft.com/office/officeart/2005/8/layout/vList2"/>
     <dgm:cxn modelId="{0D886C99-E583-48A3-A6D5-38BC5A9175BC}" srcId="{3DF9A0E9-B523-4358-A305-0503A079C29C}" destId="{5FFA7AA0-9EDB-4BA5-8BC8-A4D80815944D}" srcOrd="0" destOrd="0" parTransId="{36A21A17-C537-46E8-8135-312976EB7DEF}" sibTransId="{DCCB6330-315D-4377-9BC4-441619CAF3D5}"/>
     <dgm:cxn modelId="{3A17A6CA-855A-4639-9626-85F05BFB8DF9}" srcId="{D5A08B58-53E1-42E8-9664-B9C3420A36AD}" destId="{10BF5995-1A99-4778-9A91-0BDC3A826C34}" srcOrd="2" destOrd="0" parTransId="{E4DDEE21-B190-4661-8DFD-EE48C4221FA8}" sibTransId="{CB5879A8-BE9C-45EE-B588-C541B0B8DC71}"/>
     <dgm:cxn modelId="{C9C29ECE-B072-A040-9AA8-90B78D4B8B62}" type="presOf" srcId="{5C9988A6-494D-4CC2-A8F5-CB4F6F08CD01}" destId="{E677D39E-1316-704B-8FD9-95F619B69452}" srcOrd="0" destOrd="0" presId="urn:microsoft.com/office/officeart/2005/8/layout/vList2"/>
@@ -4134,7 +4240,7 @@
 <dgm:dataModel xmlns:dgm="http://schemas.openxmlformats.org/drawingml/2006/diagram" xmlns:a="http://schemas.openxmlformats.org/drawingml/2006/main">
   <dgm:ptLst>
     <dgm:pt modelId="{CB9B029C-E278-4998-BD8C-FCB1B9952EC3}" type="doc">
-      <dgm:prSet loTypeId="urn:microsoft.com/office/officeart/2005/8/layout/hierarchy1" loCatId="hierarchy" qsTypeId="urn:microsoft.com/office/officeart/2005/8/quickstyle/simple1" qsCatId="simple" csTypeId="urn:microsoft.com/office/officeart/2005/8/colors/colorful2" csCatId="colorful"/>
+      <dgm:prSet loTypeId="urn:microsoft.com/office/officeart/2005/8/layout/hierarchy1" loCatId="hierarchy" qsTypeId="urn:microsoft.com/office/officeart/2005/8/quickstyle/simple1" qsCatId="simple" csTypeId="urn:microsoft.com/office/officeart/2005/8/colors/colorful2" csCatId="colorful" phldr="1"/>
       <dgm:spPr/>
       <dgm:t>
         <a:bodyPr/>
@@ -4224,46 +4330,6 @@
         </a:p>
       </dgm:t>
     </dgm:pt>
-    <dgm:pt modelId="{02EFC202-FA73-4B9D-92EC-420732939356}">
-      <dgm:prSet/>
-      <dgm:spPr/>
-      <dgm:t>
-        <a:bodyPr/>
-        <a:lstStyle/>
-        <a:p>
-          <a:r>
-            <a:rPr lang="en-US" b="1"/>
-            <a:t>quarto </a:t>
-          </a:r>
-          <a:r>
-            <a:rPr lang="en-US"/>
-            <a:t>for this presentation</a:t>
-          </a:r>
-        </a:p>
-      </dgm:t>
-    </dgm:pt>
-    <dgm:pt modelId="{66C38DF7-B330-4A15-A11A-2AB0809ABA7B}" type="parTrans" cxnId="{831C3FD5-3BD4-4233-BF6C-7EEE41D014D2}">
-      <dgm:prSet/>
-      <dgm:spPr/>
-      <dgm:t>
-        <a:bodyPr/>
-        <a:lstStyle/>
-        <a:p>
-          <a:endParaRPr lang="en-US"/>
-        </a:p>
-      </dgm:t>
-    </dgm:pt>
-    <dgm:pt modelId="{689046E3-E6E1-48C8-92F7-86DEBC9C51BE}" type="sibTrans" cxnId="{831C3FD5-3BD4-4233-BF6C-7EEE41D014D2}">
-      <dgm:prSet/>
-      <dgm:spPr/>
-      <dgm:t>
-        <a:bodyPr/>
-        <a:lstStyle/>
-        <a:p>
-          <a:endParaRPr lang="en-US"/>
-        </a:p>
-      </dgm:t>
-    </dgm:pt>
     <dgm:pt modelId="{C708F89A-D259-4E70-A948-C6777393BBFD}">
       <dgm:prSet/>
       <dgm:spPr/>
@@ -4272,42 +4338,14 @@
         <a:lstStyle/>
         <a:p>
           <a:r>
-            <a:rPr lang="en-US" b="1"/>
-            <a:t>aws.s3</a:t>
+            <a:rPr lang="en-US" b="1" dirty="0"/>
+            <a:t>Amazon S3</a:t>
           </a:r>
           <a:r>
-            <a:rPr lang="en-US"/>
-            <a:t>, </a:t>
+            <a:rPr lang="en-US" b="0" dirty="0"/>
+            <a:t> to store dynamic data</a:t>
           </a:r>
-          <a:r>
-            <a:rPr lang="en-US" b="1"/>
-            <a:t>sf</a:t>
-          </a:r>
-          <a:r>
-            <a:rPr lang="en-US"/>
-            <a:t>, </a:t>
-          </a:r>
-          <a:r>
-            <a:rPr lang="en-US" b="1"/>
-            <a:t>cder</a:t>
-          </a:r>
-          <a:r>
-            <a:rPr lang="en-US"/>
-            <a:t>, </a:t>
-          </a:r>
-          <a:r>
-            <a:rPr lang="en-US" b="1"/>
-            <a:t>DT</a:t>
-          </a:r>
-          <a:r>
-            <a:rPr lang="en-US"/>
-            <a:t>, </a:t>
-          </a:r>
-          <a:r>
-            <a:rPr lang="en-US" b="1"/>
-            <a:t>purrr</a:t>
-          </a:r>
-          <a:endParaRPr lang="en-US"/>
+          <a:endParaRPr lang="en-US" dirty="0"/>
         </a:p>
       </dgm:t>
     </dgm:pt>
@@ -4354,11 +4392,11 @@
       <dgm:spPr/>
     </dgm:pt>
     <dgm:pt modelId="{BCA64983-3AF5-F84F-8C2C-7A101544C537}" type="pres">
-      <dgm:prSet presAssocID="{29B9EA3D-FEAE-42F3-A265-F2E1C9CD9484}" presName="background" presStyleLbl="node0" presStyleIdx="0" presStyleCnt="4"/>
+      <dgm:prSet presAssocID="{29B9EA3D-FEAE-42F3-A265-F2E1C9CD9484}" presName="background" presStyleLbl="node0" presStyleIdx="0" presStyleCnt="3"/>
       <dgm:spPr/>
     </dgm:pt>
     <dgm:pt modelId="{F98E3DBB-1E49-9B4A-A27A-064B394FA29F}" type="pres">
-      <dgm:prSet presAssocID="{29B9EA3D-FEAE-42F3-A265-F2E1C9CD9484}" presName="text" presStyleLbl="fgAcc0" presStyleIdx="0" presStyleCnt="4">
+      <dgm:prSet presAssocID="{29B9EA3D-FEAE-42F3-A265-F2E1C9CD9484}" presName="text" presStyleLbl="fgAcc0" presStyleIdx="0" presStyleCnt="3">
         <dgm:presLayoutVars>
           <dgm:chPref val="3"/>
         </dgm:presLayoutVars>
@@ -4378,11 +4416,11 @@
       <dgm:spPr/>
     </dgm:pt>
     <dgm:pt modelId="{BD81E52E-D635-1943-B79A-C810F68B1593}" type="pres">
-      <dgm:prSet presAssocID="{32B25AA3-0452-4C28-BF22-D6AD696F551F}" presName="background" presStyleLbl="node0" presStyleIdx="1" presStyleCnt="4"/>
+      <dgm:prSet presAssocID="{32B25AA3-0452-4C28-BF22-D6AD696F551F}" presName="background" presStyleLbl="node0" presStyleIdx="1" presStyleCnt="3"/>
       <dgm:spPr/>
     </dgm:pt>
     <dgm:pt modelId="{8D166D5B-E9A1-C94E-935A-8C4EA9008AED}" type="pres">
-      <dgm:prSet presAssocID="{32B25AA3-0452-4C28-BF22-D6AD696F551F}" presName="text" presStyleLbl="fgAcc0" presStyleIdx="1" presStyleCnt="4">
+      <dgm:prSet presAssocID="{32B25AA3-0452-4C28-BF22-D6AD696F551F}" presName="text" presStyleLbl="fgAcc0" presStyleIdx="1" presStyleCnt="3">
         <dgm:presLayoutVars>
           <dgm:chPref val="3"/>
         </dgm:presLayoutVars>
@@ -4391,30 +4429,6 @@
     </dgm:pt>
     <dgm:pt modelId="{7FBDB286-9637-C645-BD59-173238E14CA5}" type="pres">
       <dgm:prSet presAssocID="{32B25AA3-0452-4C28-BF22-D6AD696F551F}" presName="hierChild2" presStyleCnt="0"/>
-      <dgm:spPr/>
-    </dgm:pt>
-    <dgm:pt modelId="{E0334C79-D5AC-C14D-BAE2-452CE0658289}" type="pres">
-      <dgm:prSet presAssocID="{02EFC202-FA73-4B9D-92EC-420732939356}" presName="hierRoot1" presStyleCnt="0"/>
-      <dgm:spPr/>
-    </dgm:pt>
-    <dgm:pt modelId="{52940245-8CF7-714A-809B-F20549053AEC}" type="pres">
-      <dgm:prSet presAssocID="{02EFC202-FA73-4B9D-92EC-420732939356}" presName="composite" presStyleCnt="0"/>
-      <dgm:spPr/>
-    </dgm:pt>
-    <dgm:pt modelId="{54CAC527-9CF5-1C49-BC0D-1A91F3081350}" type="pres">
-      <dgm:prSet presAssocID="{02EFC202-FA73-4B9D-92EC-420732939356}" presName="background" presStyleLbl="node0" presStyleIdx="2" presStyleCnt="4"/>
-      <dgm:spPr/>
-    </dgm:pt>
-    <dgm:pt modelId="{30372AFA-A363-3C46-9B01-BA9CEF317308}" type="pres">
-      <dgm:prSet presAssocID="{02EFC202-FA73-4B9D-92EC-420732939356}" presName="text" presStyleLbl="fgAcc0" presStyleIdx="2" presStyleCnt="4">
-        <dgm:presLayoutVars>
-          <dgm:chPref val="3"/>
-        </dgm:presLayoutVars>
-      </dgm:prSet>
-      <dgm:spPr/>
-    </dgm:pt>
-    <dgm:pt modelId="{A999363E-EE66-D947-810F-409301EBE228}" type="pres">
-      <dgm:prSet presAssocID="{02EFC202-FA73-4B9D-92EC-420732939356}" presName="hierChild2" presStyleCnt="0"/>
       <dgm:spPr/>
     </dgm:pt>
     <dgm:pt modelId="{00A7B145-99C2-8F41-B785-822F80F8FA11}" type="pres">
@@ -4426,11 +4440,11 @@
       <dgm:spPr/>
     </dgm:pt>
     <dgm:pt modelId="{A6DCCCD4-6967-F447-AC8B-B396F9704AEB}" type="pres">
-      <dgm:prSet presAssocID="{C708F89A-D259-4E70-A948-C6777393BBFD}" presName="background" presStyleLbl="node0" presStyleIdx="3" presStyleCnt="4"/>
+      <dgm:prSet presAssocID="{C708F89A-D259-4E70-A948-C6777393BBFD}" presName="background" presStyleLbl="node0" presStyleIdx="2" presStyleCnt="3"/>
       <dgm:spPr/>
     </dgm:pt>
     <dgm:pt modelId="{C5FD1901-C3A1-CC44-8F32-DCA7DA177317}" type="pres">
-      <dgm:prSet presAssocID="{C708F89A-D259-4E70-A948-C6777393BBFD}" presName="text" presStyleLbl="fgAcc0" presStyleIdx="3" presStyleCnt="4">
+      <dgm:prSet presAssocID="{C708F89A-D259-4E70-A948-C6777393BBFD}" presName="text" presStyleLbl="fgAcc0" presStyleIdx="2" presStyleCnt="3">
         <dgm:presLayoutVars>
           <dgm:chPref val="3"/>
         </dgm:presLayoutVars>
@@ -4443,13 +4457,11 @@
     </dgm:pt>
   </dgm:ptLst>
   <dgm:cxnLst>
-    <dgm:cxn modelId="{BA43F14A-632C-E24C-946E-4E711D6DF762}" type="presOf" srcId="{02EFC202-FA73-4B9D-92EC-420732939356}" destId="{30372AFA-A363-3C46-9B01-BA9CEF317308}" srcOrd="0" destOrd="0" presId="urn:microsoft.com/office/officeart/2005/8/layout/hierarchy1"/>
     <dgm:cxn modelId="{51F24767-4870-EA4C-959A-C1591103F202}" type="presOf" srcId="{CB9B029C-E278-4998-BD8C-FCB1B9952EC3}" destId="{A8B1AD65-B4AA-C54D-8D25-287AEAD80ACB}" srcOrd="0" destOrd="0" presId="urn:microsoft.com/office/officeart/2005/8/layout/hierarchy1"/>
     <dgm:cxn modelId="{2DAC8C84-D551-D649-84AA-E86F61D0B81B}" type="presOf" srcId="{C708F89A-D259-4E70-A948-C6777393BBFD}" destId="{C5FD1901-C3A1-CC44-8F32-DCA7DA177317}" srcOrd="0" destOrd="0" presId="urn:microsoft.com/office/officeart/2005/8/layout/hierarchy1"/>
     <dgm:cxn modelId="{FBEC76B2-1D12-B440-B0F4-EB2A1A5D70A4}" type="presOf" srcId="{32B25AA3-0452-4C28-BF22-D6AD696F551F}" destId="{8D166D5B-E9A1-C94E-935A-8C4EA9008AED}" srcOrd="0" destOrd="0" presId="urn:microsoft.com/office/officeart/2005/8/layout/hierarchy1"/>
     <dgm:cxn modelId="{851919BF-EF6F-497F-93E8-E637245D0196}" srcId="{CB9B029C-E278-4998-BD8C-FCB1B9952EC3}" destId="{32B25AA3-0452-4C28-BF22-D6AD696F551F}" srcOrd="1" destOrd="0" parTransId="{8D8CCFA1-7D0B-4F61-9FA5-46F06BE2E03A}" sibTransId="{B8649C84-B143-4DE8-9309-CC744C37EF64}"/>
-    <dgm:cxn modelId="{831C3FD5-3BD4-4233-BF6C-7EEE41D014D2}" srcId="{CB9B029C-E278-4998-BD8C-FCB1B9952EC3}" destId="{02EFC202-FA73-4B9D-92EC-420732939356}" srcOrd="2" destOrd="0" parTransId="{66C38DF7-B330-4A15-A11A-2AB0809ABA7B}" sibTransId="{689046E3-E6E1-48C8-92F7-86DEBC9C51BE}"/>
-    <dgm:cxn modelId="{9C4624E9-179E-40F4-8B70-1997C563DA2C}" srcId="{CB9B029C-E278-4998-BD8C-FCB1B9952EC3}" destId="{C708F89A-D259-4E70-A948-C6777393BBFD}" srcOrd="3" destOrd="0" parTransId="{D5D1F48B-079B-4973-A388-C358C4A91794}" sibTransId="{1E9F718D-230C-4C46-B5BE-C5EE0F893017}"/>
+    <dgm:cxn modelId="{9C4624E9-179E-40F4-8B70-1997C563DA2C}" srcId="{CB9B029C-E278-4998-BD8C-FCB1B9952EC3}" destId="{C708F89A-D259-4E70-A948-C6777393BBFD}" srcOrd="2" destOrd="0" parTransId="{D5D1F48B-079B-4973-A388-C358C4A91794}" sibTransId="{1E9F718D-230C-4C46-B5BE-C5EE0F893017}"/>
     <dgm:cxn modelId="{419377F8-56D4-48DE-86B7-3AFB647C7DDD}" srcId="{CB9B029C-E278-4998-BD8C-FCB1B9952EC3}" destId="{29B9EA3D-FEAE-42F3-A265-F2E1C9CD9484}" srcOrd="0" destOrd="0" parTransId="{AB37A3E7-84F2-4FFF-9D0C-17C3D2CD3944}" sibTransId="{A93FA863-4BE9-41BC-AA9F-297199CA84A5}"/>
     <dgm:cxn modelId="{4ADCFEFA-07DC-3B4C-BA17-CACD883B886E}" type="presOf" srcId="{29B9EA3D-FEAE-42F3-A265-F2E1C9CD9484}" destId="{F98E3DBB-1E49-9B4A-A27A-064B394FA29F}" srcOrd="0" destOrd="0" presId="urn:microsoft.com/office/officeart/2005/8/layout/hierarchy1"/>
     <dgm:cxn modelId="{5E201D5B-3546-5D42-9482-67D080D14FAC}" type="presParOf" srcId="{A8B1AD65-B4AA-C54D-8D25-287AEAD80ACB}" destId="{021FC056-E10E-344B-9E60-843A27D43283}" srcOrd="0" destOrd="0" presId="urn:microsoft.com/office/officeart/2005/8/layout/hierarchy1"/>
@@ -4462,12 +4474,7 @@
     <dgm:cxn modelId="{4CB6FF1C-E584-4A47-A1E5-6999F8E85B1F}" type="presParOf" srcId="{353438EA-8D5B-3149-8B11-C91DE52DE64E}" destId="{BD81E52E-D635-1943-B79A-C810F68B1593}" srcOrd="0" destOrd="0" presId="urn:microsoft.com/office/officeart/2005/8/layout/hierarchy1"/>
     <dgm:cxn modelId="{7F13482A-1DF4-AF4A-BF96-2B0610C68C94}" type="presParOf" srcId="{353438EA-8D5B-3149-8B11-C91DE52DE64E}" destId="{8D166D5B-E9A1-C94E-935A-8C4EA9008AED}" srcOrd="1" destOrd="0" presId="urn:microsoft.com/office/officeart/2005/8/layout/hierarchy1"/>
     <dgm:cxn modelId="{91C3D083-D1DC-1A4D-881C-F77001E4C28D}" type="presParOf" srcId="{4087CFCF-C4D1-9241-A80B-0FEE213BA402}" destId="{7FBDB286-9637-C645-BD59-173238E14CA5}" srcOrd="1" destOrd="0" presId="urn:microsoft.com/office/officeart/2005/8/layout/hierarchy1"/>
-    <dgm:cxn modelId="{C4CE76AC-24AF-ED44-9A15-F883731CB7CC}" type="presParOf" srcId="{A8B1AD65-B4AA-C54D-8D25-287AEAD80ACB}" destId="{E0334C79-D5AC-C14D-BAE2-452CE0658289}" srcOrd="2" destOrd="0" presId="urn:microsoft.com/office/officeart/2005/8/layout/hierarchy1"/>
-    <dgm:cxn modelId="{EB3243D7-A9EA-EC4A-92A1-AEDD5A4B8F6B}" type="presParOf" srcId="{E0334C79-D5AC-C14D-BAE2-452CE0658289}" destId="{52940245-8CF7-714A-809B-F20549053AEC}" srcOrd="0" destOrd="0" presId="urn:microsoft.com/office/officeart/2005/8/layout/hierarchy1"/>
-    <dgm:cxn modelId="{1B4D3EC9-80D4-5B43-A85C-8435A9638AE6}" type="presParOf" srcId="{52940245-8CF7-714A-809B-F20549053AEC}" destId="{54CAC527-9CF5-1C49-BC0D-1A91F3081350}" srcOrd="0" destOrd="0" presId="urn:microsoft.com/office/officeart/2005/8/layout/hierarchy1"/>
-    <dgm:cxn modelId="{7CCFE38D-D16F-2F41-B8ED-465B6847B742}" type="presParOf" srcId="{52940245-8CF7-714A-809B-F20549053AEC}" destId="{30372AFA-A363-3C46-9B01-BA9CEF317308}" srcOrd="1" destOrd="0" presId="urn:microsoft.com/office/officeart/2005/8/layout/hierarchy1"/>
-    <dgm:cxn modelId="{BACDC4A8-CE7F-1E47-BF52-99A9DE3B7683}" type="presParOf" srcId="{E0334C79-D5AC-C14D-BAE2-452CE0658289}" destId="{A999363E-EE66-D947-810F-409301EBE228}" srcOrd="1" destOrd="0" presId="urn:microsoft.com/office/officeart/2005/8/layout/hierarchy1"/>
-    <dgm:cxn modelId="{2EA828E7-BD67-E54C-A680-D64750143AA0}" type="presParOf" srcId="{A8B1AD65-B4AA-C54D-8D25-287AEAD80ACB}" destId="{00A7B145-99C2-8F41-B785-822F80F8FA11}" srcOrd="3" destOrd="0" presId="urn:microsoft.com/office/officeart/2005/8/layout/hierarchy1"/>
+    <dgm:cxn modelId="{2EA828E7-BD67-E54C-A680-D64750143AA0}" type="presParOf" srcId="{A8B1AD65-B4AA-C54D-8D25-287AEAD80ACB}" destId="{00A7B145-99C2-8F41-B785-822F80F8FA11}" srcOrd="2" destOrd="0" presId="urn:microsoft.com/office/officeart/2005/8/layout/hierarchy1"/>
     <dgm:cxn modelId="{D1B1CAB5-03A1-1E44-B565-AD21F1F3AF61}" type="presParOf" srcId="{00A7B145-99C2-8F41-B785-822F80F8FA11}" destId="{82AA7518-BF1C-6A46-92FE-824A1140373F}" srcOrd="0" destOrd="0" presId="urn:microsoft.com/office/officeart/2005/8/layout/hierarchy1"/>
     <dgm:cxn modelId="{04068E22-5A58-2D4C-AA3F-455D72D5EB2B}" type="presParOf" srcId="{82AA7518-BF1C-6A46-92FE-824A1140373F}" destId="{A6DCCCD4-6967-F447-AC8B-B396F9704AEB}" srcOrd="0" destOrd="0" presId="urn:microsoft.com/office/officeart/2005/8/layout/hierarchy1"/>
     <dgm:cxn modelId="{AF44438E-FFE1-384E-8AF8-990393AE0594}" type="presParOf" srcId="{82AA7518-BF1C-6A46-92FE-824A1140373F}" destId="{C5FD1901-C3A1-CC44-8F32-DCA7DA177317}" srcOrd="1" destOrd="0" presId="urn:microsoft.com/office/officeart/2005/8/layout/hierarchy1"/>
@@ -4867,7 +4874,7 @@
         </a:prstGeom>
         <a:solidFill>
           <a:schemeClr val="accent2">
-            <a:hueOff val="2808912"/>
+            <a:hueOff val="2808911"/>
             <a:satOff val="-3503"/>
             <a:lumOff val="824"/>
             <a:alphaOff val="0"/>
@@ -4876,7 +4883,7 @@
         <a:ln w="25400" cap="flat" cmpd="sng" algn="ctr">
           <a:solidFill>
             <a:schemeClr val="accent2">
-              <a:hueOff val="2808912"/>
+              <a:hueOff val="2808911"/>
               <a:satOff val="-3503"/>
               <a:lumOff val="824"/>
               <a:alphaOff val="0"/>
@@ -4995,7 +5002,7 @@
         </a:prstGeom>
         <a:solidFill>
           <a:schemeClr val="accent2">
-            <a:hueOff val="3745216"/>
+            <a:hueOff val="3745215"/>
             <a:satOff val="-4671"/>
             <a:lumOff val="1098"/>
             <a:alphaOff val="0"/>
@@ -5004,7 +5011,7 @@
         <a:ln w="25400" cap="flat" cmpd="sng" algn="ctr">
           <a:solidFill>
             <a:schemeClr val="accent2">
-              <a:hueOff val="3745216"/>
+              <a:hueOff val="3745215"/>
               <a:satOff val="-4671"/>
               <a:lumOff val="1098"/>
               <a:alphaOff val="0"/>
@@ -5072,7 +5079,7 @@
         </a:prstGeom>
         <a:solidFill>
           <a:schemeClr val="accent2">
-            <a:hueOff val="4681520"/>
+            <a:hueOff val="4681519"/>
             <a:satOff val="-5839"/>
             <a:lumOff val="1373"/>
             <a:alphaOff val="0"/>
@@ -5081,7 +5088,7 @@
         <a:ln w="25400" cap="flat" cmpd="sng" algn="ctr">
           <a:solidFill>
             <a:schemeClr val="accent2">
-              <a:hueOff val="4681520"/>
+              <a:hueOff val="4681519"/>
               <a:satOff val="-5839"/>
               <a:lumOff val="1373"/>
               <a:alphaOff val="0"/>
@@ -5637,7 +5644,7 @@
         </a:prstGeom>
         <a:solidFill>
           <a:schemeClr val="accent2">
-            <a:hueOff val="2340760"/>
+            <a:hueOff val="2340759"/>
             <a:satOff val="-2919"/>
             <a:lumOff val="686"/>
             <a:alphaOff val="0"/>
@@ -5767,7 +5774,7 @@
             <a:buChar char="•"/>
           </a:pPr>
           <a:r>
-            <a:rPr lang="en-US" sz="1800" kern="1200"/>
+            <a:rPr lang="en-US" sz="1800" kern="1200" dirty="0"/>
             <a:t>Clickable CDEC station links</a:t>
           </a:r>
         </a:p>
@@ -5810,7 +5817,7 @@
         </a:prstGeom>
         <a:solidFill>
           <a:schemeClr val="accent2">
-            <a:hueOff val="4681520"/>
+            <a:hueOff val="4681519"/>
             <a:satOff val="-5839"/>
             <a:lumOff val="1373"/>
             <a:alphaOff val="0"/>
@@ -5862,8 +5869,8 @@
             <a:buNone/>
           </a:pPr>
           <a:r>
-            <a:rPr lang="en-US" sz="2300" kern="1200"/>
-            <a:t>Mobile and desktop optimized</a:t>
+            <a:rPr lang="en-US" sz="2300" kern="1200" dirty="0"/>
+            <a:t>Desktop and mobile optimized</a:t>
           </a:r>
         </a:p>
       </dsp:txBody>
@@ -5891,8 +5898,8 @@
       </dsp:nvSpPr>
       <dsp:spPr>
         <a:xfrm>
-          <a:off x="2401" y="748719"/>
-          <a:ext cx="1714409" cy="1088650"/>
+          <a:off x="0" y="530003"/>
+          <a:ext cx="2305088" cy="1463731"/>
         </a:xfrm>
         <a:prstGeom prst="roundRect">
           <a:avLst>
@@ -5942,8 +5949,8 @@
       </dsp:nvSpPr>
       <dsp:spPr>
         <a:xfrm>
-          <a:off x="192891" y="929684"/>
-          <a:ext cx="1714409" cy="1088650"/>
+          <a:off x="256120" y="773318"/>
+          <a:ext cx="2305088" cy="1463731"/>
         </a:xfrm>
         <a:prstGeom prst="roundRect">
           <a:avLst>
@@ -5985,12 +5992,12 @@
         <a:fontRef idx="minor"/>
       </dsp:style>
       <dsp:txBody>
-        <a:bodyPr spcFirstLastPara="0" vert="horz" wrap="square" lIns="60960" tIns="60960" rIns="60960" bIns="60960" numCol="1" spcCol="1270" anchor="ctr" anchorCtr="0">
+        <a:bodyPr spcFirstLastPara="0" vert="horz" wrap="square" lIns="80010" tIns="80010" rIns="80010" bIns="80010" numCol="1" spcCol="1270" anchor="ctr" anchorCtr="0">
           <a:noAutofit/>
         </a:bodyPr>
         <a:lstStyle/>
         <a:p>
-          <a:pPr marL="0" lvl="0" indent="0" algn="ctr" defTabSz="711200">
+          <a:pPr marL="0" lvl="0" indent="0" algn="ctr" defTabSz="933450">
             <a:lnSpc>
               <a:spcPct val="90000"/>
             </a:lnSpc>
@@ -6003,18 +6010,18 @@
             <a:buNone/>
           </a:pPr>
           <a:r>
-            <a:rPr lang="en-US" sz="1600" b="1" kern="1200"/>
+            <a:rPr lang="en-US" sz="2100" b="1" kern="1200"/>
             <a:t>R / Shiny / Leaflet</a:t>
           </a:r>
           <a:r>
-            <a:rPr lang="en-US" sz="1600" kern="1200"/>
+            <a:rPr lang="en-US" sz="2100" kern="1200"/>
             <a:t> for interactive web dashboard</a:t>
           </a:r>
         </a:p>
       </dsp:txBody>
       <dsp:txXfrm>
-        <a:off x="224776" y="961569"/>
-        <a:ext cx="1650639" cy="1024880"/>
+        <a:off x="298991" y="816189"/>
+        <a:ext cx="2219346" cy="1377989"/>
       </dsp:txXfrm>
     </dsp:sp>
     <dsp:sp modelId="{BD81E52E-D635-1943-B79A-C810F68B1593}">
@@ -6024,8 +6031,8 @@
       </dsp:nvSpPr>
       <dsp:spPr>
         <a:xfrm>
-          <a:off x="2097790" y="748719"/>
-          <a:ext cx="1714409" cy="1088650"/>
+          <a:off x="2817330" y="530003"/>
+          <a:ext cx="2305088" cy="1463731"/>
         </a:xfrm>
         <a:prstGeom prst="roundRect">
           <a:avLst>
@@ -6075,8 +6082,8 @@
       </dsp:nvSpPr>
       <dsp:spPr>
         <a:xfrm>
-          <a:off x="2288280" y="929684"/>
-          <a:ext cx="1714409" cy="1088650"/>
+          <a:off x="3073451" y="773318"/>
+          <a:ext cx="2305088" cy="1463731"/>
         </a:xfrm>
         <a:prstGeom prst="roundRect">
           <a:avLst>
@@ -6118,12 +6125,12 @@
         <a:fontRef idx="minor"/>
       </dsp:style>
       <dsp:txBody>
-        <a:bodyPr spcFirstLastPara="0" vert="horz" wrap="square" lIns="60960" tIns="60960" rIns="60960" bIns="60960" numCol="1" spcCol="1270" anchor="ctr" anchorCtr="0">
+        <a:bodyPr spcFirstLastPara="0" vert="horz" wrap="square" lIns="80010" tIns="80010" rIns="80010" bIns="80010" numCol="1" spcCol="1270" anchor="ctr" anchorCtr="0">
           <a:noAutofit/>
         </a:bodyPr>
         <a:lstStyle/>
         <a:p>
-          <a:pPr marL="0" lvl="0" indent="0" algn="ctr" defTabSz="711200">
+          <a:pPr marL="0" lvl="0" indent="0" algn="ctr" defTabSz="933450">
             <a:lnSpc>
               <a:spcPct val="90000"/>
             </a:lnSpc>
@@ -6136,151 +6143,18 @@
             <a:buNone/>
           </a:pPr>
           <a:r>
-            <a:rPr lang="en-US" sz="1600" b="1" kern="1200"/>
+            <a:rPr lang="en-US" sz="2100" b="1" kern="1200"/>
             <a:t>flexdashboard</a:t>
           </a:r>
           <a:r>
-            <a:rPr lang="en-US" sz="1600" kern="1200"/>
+            <a:rPr lang="en-US" sz="2100" kern="1200"/>
             <a:t> for gauge rendering</a:t>
           </a:r>
         </a:p>
       </dsp:txBody>
       <dsp:txXfrm>
-        <a:off x="2320165" y="961569"/>
-        <a:ext cx="1650639" cy="1024880"/>
-      </dsp:txXfrm>
-    </dsp:sp>
-    <dsp:sp modelId="{54CAC527-9CF5-1C49-BC0D-1A91F3081350}">
-      <dsp:nvSpPr>
-        <dsp:cNvPr id="0" name=""/>
-        <dsp:cNvSpPr/>
-      </dsp:nvSpPr>
-      <dsp:spPr>
-        <a:xfrm>
-          <a:off x="4193180" y="748719"/>
-          <a:ext cx="1714409" cy="1088650"/>
-        </a:xfrm>
-        <a:prstGeom prst="roundRect">
-          <a:avLst>
-            <a:gd name="adj" fmla="val 10000"/>
-          </a:avLst>
-        </a:prstGeom>
-        <a:solidFill>
-          <a:schemeClr val="accent1">
-            <a:hueOff val="0"/>
-            <a:satOff val="0"/>
-            <a:lumOff val="0"/>
-            <a:alphaOff val="0"/>
-          </a:schemeClr>
-        </a:solidFill>
-        <a:ln w="25400" cap="flat" cmpd="sng" algn="ctr">
-          <a:solidFill>
-            <a:schemeClr val="lt1">
-              <a:hueOff val="0"/>
-              <a:satOff val="0"/>
-              <a:lumOff val="0"/>
-              <a:alphaOff val="0"/>
-            </a:schemeClr>
-          </a:solidFill>
-          <a:prstDash val="solid"/>
-        </a:ln>
-        <a:effectLst/>
-      </dsp:spPr>
-      <dsp:style>
-        <a:lnRef idx="2">
-          <a:scrgbClr r="0" g="0" b="0"/>
-        </a:lnRef>
-        <a:fillRef idx="1">
-          <a:scrgbClr r="0" g="0" b="0"/>
-        </a:fillRef>
-        <a:effectRef idx="0">
-          <a:scrgbClr r="0" g="0" b="0"/>
-        </a:effectRef>
-        <a:fontRef idx="minor">
-          <a:schemeClr val="lt1"/>
-        </a:fontRef>
-      </dsp:style>
-    </dsp:sp>
-    <dsp:sp modelId="{30372AFA-A363-3C46-9B01-BA9CEF317308}">
-      <dsp:nvSpPr>
-        <dsp:cNvPr id="0" name=""/>
-        <dsp:cNvSpPr/>
-      </dsp:nvSpPr>
-      <dsp:spPr>
-        <a:xfrm>
-          <a:off x="4383670" y="929684"/>
-          <a:ext cx="1714409" cy="1088650"/>
-        </a:xfrm>
-        <a:prstGeom prst="roundRect">
-          <a:avLst>
-            <a:gd name="adj" fmla="val 10000"/>
-          </a:avLst>
-        </a:prstGeom>
-        <a:solidFill>
-          <a:schemeClr val="lt1">
-            <a:alpha val="90000"/>
-            <a:hueOff val="0"/>
-            <a:satOff val="0"/>
-            <a:lumOff val="0"/>
-            <a:alphaOff val="0"/>
-          </a:schemeClr>
-        </a:solidFill>
-        <a:ln w="25400" cap="flat" cmpd="sng" algn="ctr">
-          <a:solidFill>
-            <a:schemeClr val="accent1">
-              <a:hueOff val="0"/>
-              <a:satOff val="0"/>
-              <a:lumOff val="0"/>
-              <a:alphaOff val="0"/>
-            </a:schemeClr>
-          </a:solidFill>
-          <a:prstDash val="solid"/>
-        </a:ln>
-        <a:effectLst/>
-      </dsp:spPr>
-      <dsp:style>
-        <a:lnRef idx="2">
-          <a:scrgbClr r="0" g="0" b="0"/>
-        </a:lnRef>
-        <a:fillRef idx="1">
-          <a:scrgbClr r="0" g="0" b="0"/>
-        </a:fillRef>
-        <a:effectRef idx="0">
-          <a:scrgbClr r="0" g="0" b="0"/>
-        </a:effectRef>
-        <a:fontRef idx="minor"/>
-      </dsp:style>
-      <dsp:txBody>
-        <a:bodyPr spcFirstLastPara="0" vert="horz" wrap="square" lIns="60960" tIns="60960" rIns="60960" bIns="60960" numCol="1" spcCol="1270" anchor="ctr" anchorCtr="0">
-          <a:noAutofit/>
-        </a:bodyPr>
-        <a:lstStyle/>
-        <a:p>
-          <a:pPr marL="0" lvl="0" indent="0" algn="ctr" defTabSz="711200">
-            <a:lnSpc>
-              <a:spcPct val="90000"/>
-            </a:lnSpc>
-            <a:spcBef>
-              <a:spcPct val="0"/>
-            </a:spcBef>
-            <a:spcAft>
-              <a:spcPct val="35000"/>
-            </a:spcAft>
-            <a:buNone/>
-          </a:pPr>
-          <a:r>
-            <a:rPr lang="en-US" sz="1600" b="1" kern="1200"/>
-            <a:t>quarto </a:t>
-          </a:r>
-          <a:r>
-            <a:rPr lang="en-US" sz="1600" kern="1200"/>
-            <a:t>for this presentation</a:t>
-          </a:r>
-        </a:p>
-      </dsp:txBody>
-      <dsp:txXfrm>
-        <a:off x="4415555" y="961569"/>
-        <a:ext cx="1650639" cy="1024880"/>
+        <a:off x="3116322" y="816189"/>
+        <a:ext cx="2219346" cy="1377989"/>
       </dsp:txXfrm>
     </dsp:sp>
     <dsp:sp modelId="{A6DCCCD4-6967-F447-AC8B-B396F9704AEB}">
@@ -6290,8 +6164,8 @@
       </dsp:nvSpPr>
       <dsp:spPr>
         <a:xfrm>
-          <a:off x="6288570" y="748719"/>
-          <a:ext cx="1714409" cy="1088650"/>
+          <a:off x="5634661" y="530003"/>
+          <a:ext cx="2305088" cy="1463731"/>
         </a:xfrm>
         <a:prstGeom prst="roundRect">
           <a:avLst>
@@ -6341,8 +6215,8 @@
       </dsp:nvSpPr>
       <dsp:spPr>
         <a:xfrm>
-          <a:off x="6479060" y="929684"/>
-          <a:ext cx="1714409" cy="1088650"/>
+          <a:off x="5890782" y="773318"/>
+          <a:ext cx="2305088" cy="1463731"/>
         </a:xfrm>
         <a:prstGeom prst="roundRect">
           <a:avLst>
@@ -6384,12 +6258,12 @@
         <a:fontRef idx="minor"/>
       </dsp:style>
       <dsp:txBody>
-        <a:bodyPr spcFirstLastPara="0" vert="horz" wrap="square" lIns="60960" tIns="60960" rIns="60960" bIns="60960" numCol="1" spcCol="1270" anchor="ctr" anchorCtr="0">
+        <a:bodyPr spcFirstLastPara="0" vert="horz" wrap="square" lIns="80010" tIns="80010" rIns="80010" bIns="80010" numCol="1" spcCol="1270" anchor="ctr" anchorCtr="0">
           <a:noAutofit/>
         </a:bodyPr>
         <a:lstStyle/>
         <a:p>
-          <a:pPr marL="0" lvl="0" indent="0" algn="ctr" defTabSz="711200">
+          <a:pPr marL="0" lvl="0" indent="0" algn="ctr" defTabSz="933450">
             <a:lnSpc>
               <a:spcPct val="90000"/>
             </a:lnSpc>
@@ -6402,47 +6276,19 @@
             <a:buNone/>
           </a:pPr>
           <a:r>
-            <a:rPr lang="en-US" sz="1600" b="1" kern="1200"/>
-            <a:t>aws.s3</a:t>
+            <a:rPr lang="en-US" sz="2100" b="1" kern="1200" dirty="0"/>
+            <a:t>Amazon S3</a:t>
           </a:r>
           <a:r>
-            <a:rPr lang="en-US" sz="1600" kern="1200"/>
-            <a:t>, </a:t>
+            <a:rPr lang="en-US" sz="2100" b="0" kern="1200" dirty="0"/>
+            <a:t> to store dynamic data</a:t>
           </a:r>
-          <a:r>
-            <a:rPr lang="en-US" sz="1600" b="1" kern="1200"/>
-            <a:t>sf</a:t>
-          </a:r>
-          <a:r>
-            <a:rPr lang="en-US" sz="1600" kern="1200"/>
-            <a:t>, </a:t>
-          </a:r>
-          <a:r>
-            <a:rPr lang="en-US" sz="1600" b="1" kern="1200"/>
-            <a:t>cder</a:t>
-          </a:r>
-          <a:r>
-            <a:rPr lang="en-US" sz="1600" kern="1200"/>
-            <a:t>, </a:t>
-          </a:r>
-          <a:r>
-            <a:rPr lang="en-US" sz="1600" b="1" kern="1200"/>
-            <a:t>DT</a:t>
-          </a:r>
-          <a:r>
-            <a:rPr lang="en-US" sz="1600" kern="1200"/>
-            <a:t>, </a:t>
-          </a:r>
-          <a:r>
-            <a:rPr lang="en-US" sz="1600" b="1" kern="1200"/>
-            <a:t>purrr</a:t>
-          </a:r>
-          <a:endParaRPr lang="en-US" sz="1600" kern="1200"/>
+          <a:endParaRPr lang="en-US" sz="2100" kern="1200" dirty="0"/>
         </a:p>
       </dsp:txBody>
       <dsp:txXfrm>
-        <a:off x="6510945" y="961569"/>
-        <a:ext cx="1650639" cy="1024880"/>
+        <a:off x="5933653" y="816189"/>
+        <a:ext cx="2219346" cy="1377989"/>
       </dsp:txXfrm>
     </dsp:sp>
   </dsp:spTree>
@@ -12334,7 +12180,7 @@
           <a:p>
             <a:fld id="{241EB5C9-1307-BA42-ABA2-0BC069CD8E7F}" type="datetimeFigureOut">
               <a:rPr lang="en-US" smtClean="0"/>
-              <a:t>6/25/25</a:t>
+              <a:t>6/25/2025</a:t>
             </a:fld>
             <a:endParaRPr lang="en-US"/>
           </a:p>
@@ -12502,7 +12348,7 @@
           <a:p>
             <a:fld id="{241EB5C9-1307-BA42-ABA2-0BC069CD8E7F}" type="datetimeFigureOut">
               <a:rPr lang="en-US" smtClean="0"/>
-              <a:t>6/25/25</a:t>
+              <a:t>6/25/2025</a:t>
             </a:fld>
             <a:endParaRPr lang="en-US"/>
           </a:p>
@@ -12680,7 +12526,7 @@
           <a:p>
             <a:fld id="{241EB5C9-1307-BA42-ABA2-0BC069CD8E7F}" type="datetimeFigureOut">
               <a:rPr lang="en-US" smtClean="0"/>
-              <a:t>6/25/25</a:t>
+              <a:t>6/25/2025</a:t>
             </a:fld>
             <a:endParaRPr lang="en-US"/>
           </a:p>
@@ -12848,7 +12694,7 @@
           <a:p>
             <a:fld id="{241EB5C9-1307-BA42-ABA2-0BC069CD8E7F}" type="datetimeFigureOut">
               <a:rPr lang="en-US" smtClean="0"/>
-              <a:t>6/25/25</a:t>
+              <a:t>6/25/2025</a:t>
             </a:fld>
             <a:endParaRPr lang="en-US"/>
           </a:p>
@@ -13093,7 +12939,7 @@
           <a:p>
             <a:fld id="{241EB5C9-1307-BA42-ABA2-0BC069CD8E7F}" type="datetimeFigureOut">
               <a:rPr lang="en-US" smtClean="0"/>
-              <a:t>6/25/25</a:t>
+              <a:t>6/25/2025</a:t>
             </a:fld>
             <a:endParaRPr lang="en-US"/>
           </a:p>
@@ -13378,7 +13224,7 @@
           <a:p>
             <a:fld id="{241EB5C9-1307-BA42-ABA2-0BC069CD8E7F}" type="datetimeFigureOut">
               <a:rPr lang="en-US" smtClean="0"/>
-              <a:t>6/25/25</a:t>
+              <a:t>6/25/2025</a:t>
             </a:fld>
             <a:endParaRPr lang="en-US"/>
           </a:p>
@@ -13797,7 +13643,7 @@
           <a:p>
             <a:fld id="{241EB5C9-1307-BA42-ABA2-0BC069CD8E7F}" type="datetimeFigureOut">
               <a:rPr lang="en-US" smtClean="0"/>
-              <a:t>6/25/25</a:t>
+              <a:t>6/25/2025</a:t>
             </a:fld>
             <a:endParaRPr lang="en-US"/>
           </a:p>
@@ -13914,7 +13760,7 @@
           <a:p>
             <a:fld id="{241EB5C9-1307-BA42-ABA2-0BC069CD8E7F}" type="datetimeFigureOut">
               <a:rPr lang="en-US" smtClean="0"/>
-              <a:t>6/25/25</a:t>
+              <a:t>6/25/2025</a:t>
             </a:fld>
             <a:endParaRPr lang="en-US"/>
           </a:p>
@@ -14009,7 +13855,7 @@
           <a:p>
             <a:fld id="{241EB5C9-1307-BA42-ABA2-0BC069CD8E7F}" type="datetimeFigureOut">
               <a:rPr lang="en-US" smtClean="0"/>
-              <a:t>6/25/25</a:t>
+              <a:t>6/25/2025</a:t>
             </a:fld>
             <a:endParaRPr lang="en-US"/>
           </a:p>
@@ -14284,7 +14130,7 @@
           <a:p>
             <a:fld id="{241EB5C9-1307-BA42-ABA2-0BC069CD8E7F}" type="datetimeFigureOut">
               <a:rPr lang="en-US" smtClean="0"/>
-              <a:t>6/25/25</a:t>
+              <a:t>6/25/2025</a:t>
             </a:fld>
             <a:endParaRPr lang="en-US"/>
           </a:p>
@@ -14536,7 +14382,7 @@
           <a:p>
             <a:fld id="{241EB5C9-1307-BA42-ABA2-0BC069CD8E7F}" type="datetimeFigureOut">
               <a:rPr lang="en-US" smtClean="0"/>
-              <a:t>6/25/25</a:t>
+              <a:t>6/25/2025</a:t>
             </a:fld>
             <a:endParaRPr lang="en-US"/>
           </a:p>
@@ -14747,7 +14593,7 @@
           <a:p>
             <a:fld id="{241EB5C9-1307-BA42-ABA2-0BC069CD8E7F}" type="datetimeFigureOut">
               <a:rPr lang="en-US" smtClean="0"/>
-              <a:t>6/25/25</a:t>
+              <a:t>6/25/2025</a:t>
             </a:fld>
             <a:endParaRPr lang="en-US"/>
           </a:p>
@@ -16091,12 +15937,12 @@
               <a:buNone/>
             </a:pPr>
             <a:r>
-              <a:rPr lang="en-US" sz="3000">
+              <a:rPr lang="en-US" sz="3000" dirty="0">
                 <a:solidFill>
                   <a:srgbClr val="FFFFFF"/>
                 </a:solidFill>
               </a:rPr>
-              <a:t>Project Purpose</a:t>
+              <a:t>Dashboard Purpose</a:t>
             </a:r>
           </a:p>
         </p:txBody>
@@ -16923,7 +16769,7 @@
             <p:ph idx="1"/>
             <p:extLst>
               <p:ext uri="{D42A27DB-BD31-4B8C-83A1-F6EECF244321}">
-                <p14:modId xmlns:p14="http://schemas.microsoft.com/office/powerpoint/2010/main" val="3162652917"/>
+                <p14:modId xmlns:p14="http://schemas.microsoft.com/office/powerpoint/2010/main" val="125900583"/>
               </p:ext>
             </p:extLst>
           </p:nvPr>
@@ -17326,7 +17172,7 @@
             <p:ph idx="1"/>
             <p:extLst>
               <p:ext uri="{D42A27DB-BD31-4B8C-83A1-F6EECF244321}">
-                <p14:modId xmlns:p14="http://schemas.microsoft.com/office/powerpoint/2010/main" val="2076339300"/>
+                <p14:modId xmlns:p14="http://schemas.microsoft.com/office/powerpoint/2010/main" val="3995433607"/>
               </p:ext>
             </p:extLst>
           </p:nvPr>
@@ -17831,6 +17677,430 @@
 </p:sld>
 </file>
 
+<file path=ppt/slides/slide7.xml><?xml version="1.0" encoding="utf-8"?>
+<p:sld xmlns:a="http://schemas.openxmlformats.org/drawingml/2006/main" xmlns:r="http://schemas.openxmlformats.org/officeDocument/2006/relationships" xmlns:p="http://schemas.openxmlformats.org/presentationml/2006/main">
+  <p:cSld>
+    <p:bg>
+      <p:bgPr>
+        <a:solidFill>
+          <a:schemeClr val="bg1"/>
+        </a:solidFill>
+        <a:effectLst/>
+      </p:bgPr>
+    </p:bg>
+    <p:spTree>
+      <p:nvGrpSpPr>
+        <p:cNvPr id="1" name="">
+          <a:extLst>
+            <a:ext uri="{FF2B5EF4-FFF2-40B4-BE49-F238E27FC236}">
+              <a16:creationId xmlns:a16="http://schemas.microsoft.com/office/drawing/2014/main" id="{8F884E8B-577F-2F75-B82C-88796BBC4AE0}"/>
+            </a:ext>
+          </a:extLst>
+        </p:cNvPr>
+        <p:cNvGrpSpPr/>
+        <p:nvPr/>
+      </p:nvGrpSpPr>
+      <p:grpSpPr>
+        <a:xfrm>
+          <a:off x="0" y="0"/>
+          <a:ext cx="0" cy="0"/>
+          <a:chOff x="0" y="0"/>
+          <a:chExt cx="0" cy="0"/>
+        </a:xfrm>
+      </p:grpSpPr>
+      <p:sp useBgFill="1">
+        <p:nvSpPr>
+          <p:cNvPr id="10" name="Rectangle 9">
+            <a:extLst>
+              <a:ext uri="{FF2B5EF4-FFF2-40B4-BE49-F238E27FC236}">
+                <a16:creationId xmlns:a16="http://schemas.microsoft.com/office/drawing/2014/main" id="{E97FB1D1-BB6A-F98A-DDB1-DBCD24B8722C}"/>
+              </a:ext>
+              <a:ext uri="{C183D7F6-B498-43B3-948B-1728B52AA6E4}">
+                <adec:decorative xmlns:adec="http://schemas.microsoft.com/office/drawing/2017/decorative" val="1"/>
+              </a:ext>
+            </a:extLst>
+          </p:cNvPr>
+          <p:cNvSpPr>
+            <a:spLocks noGrp="1" noRot="1" noChangeAspect="1" noMove="1" noResize="1" noEditPoints="1" noAdjustHandles="1" noChangeArrowheads="1" noChangeShapeType="1" noTextEdit="1"/>
+          </p:cNvSpPr>
+          <p:nvPr>
+            <p:extLst>
+              <p:ext uri="{386F3935-93C4-4BCD-93E2-E3B085C9AB24}">
+                <p16:designElem xmlns:p16="http://schemas.microsoft.com/office/powerpoint/2015/main" val="1"/>
+              </p:ext>
+            </p:extLst>
+          </p:nvPr>
+        </p:nvSpPr>
+        <p:spPr>
+          <a:xfrm>
+            <a:off x="0" y="0"/>
+            <a:ext cx="9144000" cy="5143500"/>
+          </a:xfrm>
+          <a:prstGeom prst="rect">
+            <a:avLst/>
+          </a:prstGeom>
+          <a:ln w="12700" cap="flat" cmpd="sng" algn="ctr">
+            <a:noFill/>
+            <a:prstDash val="solid"/>
+            <a:miter lim="800000"/>
+          </a:ln>
+          <a:effectLst/>
+          <a:extLst>
+            <a:ext uri="{91240B29-F687-4F45-9708-019B960494DF}">
+              <a14:hiddenLine xmlns:a14="http://schemas.microsoft.com/office/drawing/2010/main" w="12700" cap="flat" cmpd="sng" algn="ctr">
+                <a:solidFill>
+                  <a:schemeClr val="accent1">
+                    <a:shade val="50000"/>
+                  </a:schemeClr>
+                </a:solidFill>
+                <a:prstDash val="solid"/>
+                <a:miter lim="800000"/>
+              </a14:hiddenLine>
+            </a:ext>
+          </a:extLst>
+        </p:spPr>
+        <p:style>
+          <a:lnRef idx="2">
+            <a:schemeClr val="accent1">
+              <a:shade val="50000"/>
+            </a:schemeClr>
+          </a:lnRef>
+          <a:fillRef idx="1">
+            <a:schemeClr val="accent1"/>
+          </a:fillRef>
+          <a:effectRef idx="0">
+            <a:schemeClr val="accent1"/>
+          </a:effectRef>
+          <a:fontRef idx="minor">
+            <a:schemeClr val="lt1"/>
+          </a:fontRef>
+        </p:style>
+        <p:txBody>
+          <a:bodyPr rtlCol="0" anchor="ctr"/>
+          <a:lstStyle/>
+          <a:p>
+            <a:pPr algn="ctr"/>
+            <a:endParaRPr lang="en-US"/>
+          </a:p>
+        </p:txBody>
+      </p:sp>
+      <p:sp>
+        <p:nvSpPr>
+          <p:cNvPr id="12" name="Rectangle 11">
+            <a:extLst>
+              <a:ext uri="{FF2B5EF4-FFF2-40B4-BE49-F238E27FC236}">
+                <a16:creationId xmlns:a16="http://schemas.microsoft.com/office/drawing/2014/main" id="{847193E4-4FF3-2E92-296D-63DCFDCE3B0E}"/>
+              </a:ext>
+              <a:ext uri="{C183D7F6-B498-43B3-948B-1728B52AA6E4}">
+                <adec:decorative xmlns:adec="http://schemas.microsoft.com/office/drawing/2017/decorative" val="1"/>
+              </a:ext>
+            </a:extLst>
+          </p:cNvPr>
+          <p:cNvSpPr>
+            <a:spLocks noGrp="1" noRot="1" noChangeAspect="1" noMove="1" noResize="1" noEditPoints="1" noAdjustHandles="1" noChangeArrowheads="1" noChangeShapeType="1" noTextEdit="1"/>
+          </p:cNvSpPr>
+          <p:nvPr>
+            <p:extLst>
+              <p:ext uri="{386F3935-93C4-4BCD-93E2-E3B085C9AB24}">
+                <p16:designElem xmlns:p16="http://schemas.microsoft.com/office/powerpoint/2015/main" val="1"/>
+              </p:ext>
+            </p:extLst>
+          </p:nvPr>
+        </p:nvSpPr>
+        <p:spPr>
+          <a:xfrm rot="10800000" flipH="1">
+            <a:off x="1" y="0"/>
+            <a:ext cx="9143999" cy="1181966"/>
+          </a:xfrm>
+          <a:prstGeom prst="rect">
+            <a:avLst/>
+          </a:prstGeom>
+          <a:gradFill>
+            <a:gsLst>
+              <a:gs pos="0">
+                <a:srgbClr val="000000">
+                  <a:alpha val="96000"/>
+                </a:srgbClr>
+              </a:gs>
+              <a:gs pos="100000">
+                <a:schemeClr val="accent1">
+                  <a:lumMod val="75000"/>
+                </a:schemeClr>
+              </a:gs>
+            </a:gsLst>
+            <a:lin ang="6000000" scaled="0"/>
+          </a:gradFill>
+          <a:ln>
+            <a:noFill/>
+          </a:ln>
+        </p:spPr>
+        <p:style>
+          <a:lnRef idx="2">
+            <a:schemeClr val="accent1">
+              <a:shade val="50000"/>
+            </a:schemeClr>
+          </a:lnRef>
+          <a:fillRef idx="1">
+            <a:schemeClr val="accent1"/>
+          </a:fillRef>
+          <a:effectRef idx="0">
+            <a:schemeClr val="accent1"/>
+          </a:effectRef>
+          <a:fontRef idx="minor">
+            <a:schemeClr val="lt1"/>
+          </a:fontRef>
+        </p:style>
+        <p:txBody>
+          <a:bodyPr rtlCol="0" anchor="ctr"/>
+          <a:lstStyle/>
+          <a:p>
+            <a:pPr algn="ctr"/>
+            <a:endParaRPr lang="en-US"/>
+          </a:p>
+        </p:txBody>
+      </p:sp>
+      <p:sp>
+        <p:nvSpPr>
+          <p:cNvPr id="14" name="Rectangle 13">
+            <a:extLst>
+              <a:ext uri="{FF2B5EF4-FFF2-40B4-BE49-F238E27FC236}">
+                <a16:creationId xmlns:a16="http://schemas.microsoft.com/office/drawing/2014/main" id="{A4148B3B-281F-7D65-2066-C9D9F02F097A}"/>
+              </a:ext>
+              <a:ext uri="{C183D7F6-B498-43B3-948B-1728B52AA6E4}">
+                <adec:decorative xmlns:adec="http://schemas.microsoft.com/office/drawing/2017/decorative" val="1"/>
+              </a:ext>
+            </a:extLst>
+          </p:cNvPr>
+          <p:cNvSpPr>
+            <a:spLocks noGrp="1" noRot="1" noChangeAspect="1" noMove="1" noResize="1" noEditPoints="1" noAdjustHandles="1" noChangeArrowheads="1" noChangeShapeType="1" noTextEdit="1"/>
+          </p:cNvSpPr>
+          <p:nvPr>
+            <p:extLst>
+              <p:ext uri="{386F3935-93C4-4BCD-93E2-E3B085C9AB24}">
+                <p16:designElem xmlns:p16="http://schemas.microsoft.com/office/powerpoint/2015/main" val="1"/>
+              </p:ext>
+            </p:extLst>
+          </p:nvPr>
+        </p:nvSpPr>
+        <p:spPr>
+          <a:xfrm>
+            <a:off x="0" y="0"/>
+            <a:ext cx="6096642" cy="1181595"/>
+          </a:xfrm>
+          <a:prstGeom prst="rect">
+            <a:avLst/>
+          </a:prstGeom>
+          <a:gradFill>
+            <a:gsLst>
+              <a:gs pos="0">
+                <a:schemeClr val="accent1">
+                  <a:alpha val="41000"/>
+                </a:schemeClr>
+              </a:gs>
+              <a:gs pos="74000">
+                <a:schemeClr val="accent1">
+                  <a:lumMod val="60000"/>
+                  <a:lumOff val="40000"/>
+                  <a:alpha val="0"/>
+                </a:schemeClr>
+              </a:gs>
+            </a:gsLst>
+            <a:lin ang="8400000" scaled="0"/>
+          </a:gradFill>
+          <a:ln>
+            <a:noFill/>
+          </a:ln>
+        </p:spPr>
+        <p:style>
+          <a:lnRef idx="2">
+            <a:schemeClr val="accent1">
+              <a:shade val="50000"/>
+            </a:schemeClr>
+          </a:lnRef>
+          <a:fillRef idx="1">
+            <a:schemeClr val="accent1"/>
+          </a:fillRef>
+          <a:effectRef idx="0">
+            <a:schemeClr val="accent1"/>
+          </a:effectRef>
+          <a:fontRef idx="minor">
+            <a:schemeClr val="lt1"/>
+          </a:fontRef>
+        </p:style>
+        <p:txBody>
+          <a:bodyPr rtlCol="0" anchor="ctr"/>
+          <a:lstStyle/>
+          <a:p>
+            <a:pPr algn="ctr"/>
+            <a:endParaRPr lang="en-US"/>
+          </a:p>
+        </p:txBody>
+      </p:sp>
+      <p:sp>
+        <p:nvSpPr>
+          <p:cNvPr id="16" name="Rectangle 15">
+            <a:extLst>
+              <a:ext uri="{FF2B5EF4-FFF2-40B4-BE49-F238E27FC236}">
+                <a16:creationId xmlns:a16="http://schemas.microsoft.com/office/drawing/2014/main" id="{40A75188-16A8-79B9-5766-A2F3DDCC76F0}"/>
+              </a:ext>
+              <a:ext uri="{C183D7F6-B498-43B3-948B-1728B52AA6E4}">
+                <adec:decorative xmlns:adec="http://schemas.microsoft.com/office/drawing/2017/decorative" val="1"/>
+              </a:ext>
+            </a:extLst>
+          </p:cNvPr>
+          <p:cNvSpPr>
+            <a:spLocks noGrp="1" noRot="1" noChangeAspect="1" noMove="1" noResize="1" noEditPoints="1" noAdjustHandles="1" noChangeArrowheads="1" noChangeShapeType="1" noTextEdit="1"/>
+          </p:cNvSpPr>
+          <p:nvPr>
+            <p:extLst>
+              <p:ext uri="{386F3935-93C4-4BCD-93E2-E3B085C9AB24}">
+                <p16:designElem xmlns:p16="http://schemas.microsoft.com/office/powerpoint/2015/main" val="1"/>
+              </p:ext>
+            </p:extLst>
+          </p:nvPr>
+        </p:nvSpPr>
+        <p:spPr>
+          <a:xfrm flipH="1">
+            <a:off x="-2" y="0"/>
+            <a:ext cx="9144001" cy="1180732"/>
+          </a:xfrm>
+          <a:prstGeom prst="rect">
+            <a:avLst/>
+          </a:prstGeom>
+          <a:gradFill>
+            <a:gsLst>
+              <a:gs pos="0">
+                <a:srgbClr val="000000">
+                  <a:alpha val="63000"/>
+                </a:srgbClr>
+              </a:gs>
+              <a:gs pos="78000">
+                <a:schemeClr val="accent1">
+                  <a:alpha val="15000"/>
+                </a:schemeClr>
+              </a:gs>
+            </a:gsLst>
+            <a:lin ang="15600000" scaled="0"/>
+          </a:gradFill>
+          <a:ln>
+            <a:noFill/>
+          </a:ln>
+        </p:spPr>
+        <p:style>
+          <a:lnRef idx="2">
+            <a:schemeClr val="accent1">
+              <a:shade val="50000"/>
+            </a:schemeClr>
+          </a:lnRef>
+          <a:fillRef idx="1">
+            <a:schemeClr val="accent1"/>
+          </a:fillRef>
+          <a:effectRef idx="0">
+            <a:schemeClr val="accent1"/>
+          </a:effectRef>
+          <a:fontRef idx="minor">
+            <a:schemeClr val="lt1"/>
+          </a:fontRef>
+        </p:style>
+        <p:txBody>
+          <a:bodyPr rtlCol="0" anchor="ctr"/>
+          <a:lstStyle/>
+          <a:p>
+            <a:pPr algn="ctr"/>
+            <a:endParaRPr lang="en-US"/>
+          </a:p>
+        </p:txBody>
+      </p:sp>
+      <p:sp>
+        <p:nvSpPr>
+          <p:cNvPr id="2" name="Title 1">
+            <a:extLst>
+              <a:ext uri="{FF2B5EF4-FFF2-40B4-BE49-F238E27FC236}">
+                <a16:creationId xmlns:a16="http://schemas.microsoft.com/office/drawing/2014/main" id="{6701D9D7-AB6D-C769-5F02-902E38A17CF6}"/>
+              </a:ext>
+            </a:extLst>
+          </p:cNvPr>
+          <p:cNvSpPr>
+            <a:spLocks noGrp="1"/>
+          </p:cNvSpPr>
+          <p:nvPr>
+            <p:ph type="title"/>
+          </p:nvPr>
+        </p:nvSpPr>
+        <p:spPr>
+          <a:xfrm>
+            <a:off x="524784" y="186028"/>
+            <a:ext cx="5297791" cy="869400"/>
+          </a:xfrm>
+        </p:spPr>
+        <p:txBody>
+          <a:bodyPr vert="horz" lIns="91440" tIns="45720" rIns="91440" bIns="45720" rtlCol="0" anchor="ctr">
+            <a:normAutofit/>
+          </a:bodyPr>
+          <a:lstStyle/>
+          <a:p>
+            <a:pPr marL="0" lvl="0" indent="0" algn="l" defTabSz="914400">
+              <a:lnSpc>
+                <a:spcPct val="90000"/>
+              </a:lnSpc>
+            </a:pPr>
+            <a:r>
+              <a:rPr lang="en-US" sz="3000" kern="1200" dirty="0">
+                <a:solidFill>
+                  <a:srgbClr val="FFFFFF"/>
+                </a:solidFill>
+                <a:latin typeface="+mj-lt"/>
+                <a:ea typeface="+mj-ea"/>
+                <a:cs typeface="+mj-cs"/>
+              </a:rPr>
+              <a:t>GitHub Repository</a:t>
+            </a:r>
+          </a:p>
+        </p:txBody>
+      </p:sp>
+      <p:pic>
+        <p:nvPicPr>
+          <p:cNvPr id="5" name="Picture 4" descr="A qr code on a white background&#10;&#10;AI-generated content may be incorrect.">
+            <a:extLst>
+              <a:ext uri="{FF2B5EF4-FFF2-40B4-BE49-F238E27FC236}">
+                <a16:creationId xmlns:a16="http://schemas.microsoft.com/office/drawing/2014/main" id="{B2F424F3-89F1-4467-97B7-A1BEF12E8673}"/>
+              </a:ext>
+            </a:extLst>
+          </p:cNvPr>
+          <p:cNvPicPr>
+            <a:picLocks noChangeAspect="1"/>
+          </p:cNvPicPr>
+          <p:nvPr/>
+        </p:nvPicPr>
+        <p:blipFill>
+          <a:blip r:embed="rId2"/>
+          <a:stretch>
+            <a:fillRect/>
+          </a:stretch>
+        </p:blipFill>
+        <p:spPr>
+          <a:xfrm>
+            <a:off x="2902439" y="1474719"/>
+            <a:ext cx="3339120" cy="3339120"/>
+          </a:xfrm>
+          <a:prstGeom prst="rect">
+            <a:avLst/>
+          </a:prstGeom>
+        </p:spPr>
+      </p:pic>
+    </p:spTree>
+    <p:extLst>
+      <p:ext uri="{BB962C8B-B14F-4D97-AF65-F5344CB8AC3E}">
+        <p14:creationId xmlns:p14="http://schemas.microsoft.com/office/powerpoint/2010/main" val="4049966355"/>
+      </p:ext>
+    </p:extLst>
+  </p:cSld>
+  <p:clrMapOvr>
+    <a:masterClrMapping/>
+  </p:clrMapOvr>
+</p:sld>
+</file>
+
 <file path=ppt/theme/theme1.xml><?xml version="1.0" encoding="utf-8"?>
 <a:theme xmlns:a="http://schemas.openxmlformats.org/drawingml/2006/main" name="Office Theme">
   <a:themeElements>

--- a/presentation/scott-shasta-presentation-final.pptx
+++ b/presentation/scott-shasta-presentation-final.pptx
@@ -3620,9 +3620,9 @@
     <dgm:cxn modelId="{F3EC7907-0837-3C40-BBBF-EF4C9C750FC9}" type="presOf" srcId="{DC11989D-4604-4F83-9D56-B44EF84C6B45}" destId="{19A1D243-C7BB-AA47-87FA-0456B974F1F0}" srcOrd="0" destOrd="0" presId="urn:microsoft.com/office/officeart/2016/7/layout/BasicLinearProcessNumbered"/>
     <dgm:cxn modelId="{0762A81D-B47C-C849-B7C8-3B997FD2DAE5}" type="presOf" srcId="{A301882F-7311-4AC9-8388-F9C7185D5173}" destId="{A1D1C971-A419-034A-A3F5-683E273760D5}" srcOrd="0" destOrd="0" presId="urn:microsoft.com/office/officeart/2016/7/layout/BasicLinearProcessNumbered"/>
     <dgm:cxn modelId="{86146221-46A2-864A-A057-B75374633BA9}" type="presOf" srcId="{9707740C-F185-402E-B5D3-54C3C08E98A3}" destId="{2AB9C63F-F6B7-3642-A604-EE0CBA3A1198}" srcOrd="0" destOrd="0" presId="urn:microsoft.com/office/officeart/2016/7/layout/BasicLinearProcessNumbered"/>
+    <dgm:cxn modelId="{6116F443-28E8-C047-8B44-799D3FC1661A}" type="presOf" srcId="{76873009-1ECE-476F-AB9D-59BBBFC4370E}" destId="{C2D2A70A-A559-4845-9CA9-946AD274FA5F}" srcOrd="1" destOrd="0" presId="urn:microsoft.com/office/officeart/2016/7/layout/BasicLinearProcessNumbered"/>
     <dgm:cxn modelId="{E351C25E-8CDE-4C4F-B176-125FF7962123}" type="presOf" srcId="{76873009-1ECE-476F-AB9D-59BBBFC4370E}" destId="{11FCA7D9-3020-7D47-8A92-D98D459D1310}" srcOrd="0" destOrd="0" presId="urn:microsoft.com/office/officeart/2016/7/layout/BasicLinearProcessNumbered"/>
     <dgm:cxn modelId="{C188BF63-FED7-4883-8F69-592807DAC06D}" srcId="{90C57F78-32D2-451B-9E1D-79A1E1010940}" destId="{76873009-1ECE-476F-AB9D-59BBBFC4370E}" srcOrd="2" destOrd="0" parTransId="{608233CF-EAE6-448C-AA4E-ECD8EF5B900B}" sibTransId="{2E974CA0-3895-4A36-86AE-A55E75943316}"/>
-    <dgm:cxn modelId="{6116F443-28E8-C047-8B44-799D3FC1661A}" type="presOf" srcId="{76873009-1ECE-476F-AB9D-59BBBFC4370E}" destId="{C2D2A70A-A559-4845-9CA9-946AD274FA5F}" srcOrd="1" destOrd="0" presId="urn:microsoft.com/office/officeart/2016/7/layout/BasicLinearProcessNumbered"/>
     <dgm:cxn modelId="{C1895073-C879-E040-BC78-FADEB4E5DB19}" type="presOf" srcId="{90C57F78-32D2-451B-9E1D-79A1E1010940}" destId="{18C9058D-BB83-C344-9D9C-C0C5459B5548}" srcOrd="0" destOrd="0" presId="urn:microsoft.com/office/officeart/2016/7/layout/BasicLinearProcessNumbered"/>
     <dgm:cxn modelId="{E76D8D7A-0594-4090-AC28-13E2817496AA}" srcId="{90C57F78-32D2-451B-9E1D-79A1E1010940}" destId="{9707740C-F185-402E-B5D3-54C3C08E98A3}" srcOrd="1" destOrd="0" parTransId="{7B5CADD5-230C-4594-B5E7-403FA9AD5058}" sibTransId="{7F800790-5179-421F-B770-B3FD19CC094A}"/>
     <dgm:cxn modelId="{8FB6E5A7-6799-4A4C-8C4B-146049674142}" type="presOf" srcId="{DC11989D-4604-4F83-9D56-B44EF84C6B45}" destId="{60BA85D8-9481-7144-9752-C02E0D00548D}" srcOrd="1" destOrd="0" presId="urn:microsoft.com/office/officeart/2016/7/layout/BasicLinearProcessNumbered"/>
@@ -3761,11 +3761,11 @@
         <a:p>
           <a:r>
             <a:rPr lang="en-US" b="1" dirty="0"/>
-            <a:t>AWS S3</a:t>
+            <a:t>POD Curtailment Status </a:t>
           </a:r>
           <a:r>
             <a:rPr lang="en-US" dirty="0"/>
-            <a:t> – Storage of preprocessed POD and water right datasets.</a:t>
+            <a:t>– Provided by Drought Unit</a:t>
           </a:r>
         </a:p>
       </dgm:t>
@@ -4210,10 +4210,10 @@
     <dgm:cxn modelId="{34992809-EBEF-4C24-9A7C-88D5A10D8C77}" srcId="{3DF9A0E9-B523-4358-A305-0503A079C29C}" destId="{EE09A054-21A1-44C1-AA3C-ED033B2420A0}" srcOrd="1" destOrd="0" parTransId="{7CCEC0AD-F433-441D-883C-47961BD74E10}" sibTransId="{0F100F41-63C2-4D4B-B8C8-22E4CAEF200E}"/>
     <dgm:cxn modelId="{FC92A40F-B461-0440-9B8F-1988D2396B07}" type="presOf" srcId="{10BF5995-1A99-4778-9A91-0BDC3A826C34}" destId="{B91CCC38-5DF1-254F-999A-29C9D656A457}" srcOrd="0" destOrd="0" presId="urn:microsoft.com/office/officeart/2005/8/layout/vList2"/>
     <dgm:cxn modelId="{E7B9C411-3051-9B41-BFED-3A41F06411ED}" type="presOf" srcId="{5FFA7AA0-9EDB-4BA5-8BC8-A4D80815944D}" destId="{45AB22EF-A779-E748-A398-3398C94A2D1B}" srcOrd="0" destOrd="0" presId="urn:microsoft.com/office/officeart/2005/8/layout/vList2"/>
+    <dgm:cxn modelId="{EB5CAD53-236C-AB42-A95F-6D06B01AC46E}" type="presOf" srcId="{D5A08B58-53E1-42E8-9664-B9C3420A36AD}" destId="{A92B7CDA-DE2B-9245-BC49-00B1AD9C6C38}" srcOrd="0" destOrd="0" presId="urn:microsoft.com/office/officeart/2005/8/layout/vList2"/>
+    <dgm:cxn modelId="{2B1E4A59-CD40-4622-B76F-6B091BF53CD8}" srcId="{D5A08B58-53E1-42E8-9664-B9C3420A36AD}" destId="{5C9988A6-494D-4CC2-A8F5-CB4F6F08CD01}" srcOrd="0" destOrd="0" parTransId="{7559263F-06D1-4595-BF52-3085C8452B1C}" sibTransId="{B40D48C6-3ACF-46AA-ADB1-D8DFC02C70A4}"/>
     <dgm:cxn modelId="{6169CD67-B7BF-9C4D-82DE-232CFB7078F1}" type="presOf" srcId="{6D259E67-E736-4299-874C-2E4B44110CBB}" destId="{45AB22EF-A779-E748-A398-3398C94A2D1B}" srcOrd="0" destOrd="2" presId="urn:microsoft.com/office/officeart/2005/8/layout/vList2"/>
     <dgm:cxn modelId="{A0B7B472-172D-4B40-93CD-A7613F673E32}" type="presOf" srcId="{3DF9A0E9-B523-4358-A305-0503A079C29C}" destId="{A3D1242B-E700-B643-8E36-177E9FD6B317}" srcOrd="0" destOrd="0" presId="urn:microsoft.com/office/officeart/2005/8/layout/vList2"/>
-    <dgm:cxn modelId="{EB5CAD53-236C-AB42-A95F-6D06B01AC46E}" type="presOf" srcId="{D5A08B58-53E1-42E8-9664-B9C3420A36AD}" destId="{A92B7CDA-DE2B-9245-BC49-00B1AD9C6C38}" srcOrd="0" destOrd="0" presId="urn:microsoft.com/office/officeart/2005/8/layout/vList2"/>
-    <dgm:cxn modelId="{2B1E4A59-CD40-4622-B76F-6B091BF53CD8}" srcId="{D5A08B58-53E1-42E8-9664-B9C3420A36AD}" destId="{5C9988A6-494D-4CC2-A8F5-CB4F6F08CD01}" srcOrd="0" destOrd="0" parTransId="{7559263F-06D1-4595-BF52-3085C8452B1C}" sibTransId="{B40D48C6-3ACF-46AA-ADB1-D8DFC02C70A4}"/>
     <dgm:cxn modelId="{0D886C99-E583-48A3-A6D5-38BC5A9175BC}" srcId="{3DF9A0E9-B523-4358-A305-0503A079C29C}" destId="{5FFA7AA0-9EDB-4BA5-8BC8-A4D80815944D}" srcOrd="0" destOrd="0" parTransId="{36A21A17-C537-46E8-8135-312976EB7DEF}" sibTransId="{DCCB6330-315D-4377-9BC4-441619CAF3D5}"/>
     <dgm:cxn modelId="{3A17A6CA-855A-4639-9626-85F05BFB8DF9}" srcId="{D5A08B58-53E1-42E8-9664-B9C3420A36AD}" destId="{10BF5995-1A99-4778-9A91-0BDC3A826C34}" srcOrd="2" destOrd="0" parTransId="{E4DDEE21-B190-4661-8DFD-EE48C4221FA8}" sibTransId="{CB5879A8-BE9C-45EE-B588-C541B0B8DC71}"/>
     <dgm:cxn modelId="{C9C29ECE-B072-A040-9AA8-90B78D4B8B62}" type="presOf" srcId="{5C9988A6-494D-4CC2-A8F5-CB4F6F08CD01}" destId="{E677D39E-1316-704B-8FD9-95F619B69452}" srcOrd="0" destOrd="0" presId="urn:microsoft.com/office/officeart/2005/8/layout/vList2"/>
@@ -4874,7 +4874,7 @@
         </a:prstGeom>
         <a:solidFill>
           <a:schemeClr val="accent2">
-            <a:hueOff val="2808911"/>
+            <a:hueOff val="2808912"/>
             <a:satOff val="-3503"/>
             <a:lumOff val="824"/>
             <a:alphaOff val="0"/>
@@ -4883,7 +4883,7 @@
         <a:ln w="25400" cap="flat" cmpd="sng" algn="ctr">
           <a:solidFill>
             <a:schemeClr val="accent2">
-              <a:hueOff val="2808911"/>
+              <a:hueOff val="2808912"/>
               <a:satOff val="-3503"/>
               <a:lumOff val="824"/>
               <a:alphaOff val="0"/>
@@ -5002,7 +5002,7 @@
         </a:prstGeom>
         <a:solidFill>
           <a:schemeClr val="accent2">
-            <a:hueOff val="3745215"/>
+            <a:hueOff val="3745216"/>
             <a:satOff val="-4671"/>
             <a:lumOff val="1098"/>
             <a:alphaOff val="0"/>
@@ -5011,7 +5011,7 @@
         <a:ln w="25400" cap="flat" cmpd="sng" algn="ctr">
           <a:solidFill>
             <a:schemeClr val="accent2">
-              <a:hueOff val="3745215"/>
+              <a:hueOff val="3745216"/>
               <a:satOff val="-4671"/>
               <a:lumOff val="1098"/>
               <a:alphaOff val="0"/>
@@ -5079,7 +5079,7 @@
         </a:prstGeom>
         <a:solidFill>
           <a:schemeClr val="accent2">
-            <a:hueOff val="4681519"/>
+            <a:hueOff val="4681520"/>
             <a:satOff val="-5839"/>
             <a:lumOff val="1373"/>
             <a:alphaOff val="0"/>
@@ -5088,7 +5088,7 @@
         <a:ln w="25400" cap="flat" cmpd="sng" algn="ctr">
           <a:solidFill>
             <a:schemeClr val="accent2">
-              <a:hueOff val="4681519"/>
+              <a:hueOff val="4681520"/>
               <a:satOff val="-5839"/>
               <a:lumOff val="1373"/>
               <a:alphaOff val="0"/>
@@ -5511,11 +5511,11 @@
           </a:pPr>
           <a:r>
             <a:rPr lang="en-US" sz="2100" b="1" kern="1200" dirty="0"/>
-            <a:t>AWS S3</a:t>
+            <a:t>POD Curtailment Status </a:t>
           </a:r>
           <a:r>
             <a:rPr lang="en-US" sz="2100" kern="1200" dirty="0"/>
-            <a:t> – Storage of preprocessed POD and water right datasets.</a:t>
+            <a:t>– Provided by Drought Unit</a:t>
           </a:r>
         </a:p>
       </dsp:txBody>
@@ -5644,7 +5644,7 @@
         </a:prstGeom>
         <a:solidFill>
           <a:schemeClr val="accent2">
-            <a:hueOff val="2340759"/>
+            <a:hueOff val="2340760"/>
             <a:satOff val="-2919"/>
             <a:lumOff val="686"/>
             <a:alphaOff val="0"/>
@@ -5817,7 +5817,7 @@
         </a:prstGeom>
         <a:solidFill>
           <a:schemeClr val="accent2">
-            <a:hueOff val="4681519"/>
+            <a:hueOff val="4681520"/>
             <a:satOff val="-5839"/>
             <a:lumOff val="1373"/>
             <a:alphaOff val="0"/>
@@ -12180,7 +12180,7 @@
           <a:p>
             <a:fld id="{241EB5C9-1307-BA42-ABA2-0BC069CD8E7F}" type="datetimeFigureOut">
               <a:rPr lang="en-US" smtClean="0"/>
-              <a:t>6/25/2025</a:t>
+              <a:t>6/25/25</a:t>
             </a:fld>
             <a:endParaRPr lang="en-US"/>
           </a:p>
@@ -12348,7 +12348,7 @@
           <a:p>
             <a:fld id="{241EB5C9-1307-BA42-ABA2-0BC069CD8E7F}" type="datetimeFigureOut">
               <a:rPr lang="en-US" smtClean="0"/>
-              <a:t>6/25/2025</a:t>
+              <a:t>6/25/25</a:t>
             </a:fld>
             <a:endParaRPr lang="en-US"/>
           </a:p>
@@ -12526,7 +12526,7 @@
           <a:p>
             <a:fld id="{241EB5C9-1307-BA42-ABA2-0BC069CD8E7F}" type="datetimeFigureOut">
               <a:rPr lang="en-US" smtClean="0"/>
-              <a:t>6/25/2025</a:t>
+              <a:t>6/25/25</a:t>
             </a:fld>
             <a:endParaRPr lang="en-US"/>
           </a:p>
@@ -12694,7 +12694,7 @@
           <a:p>
             <a:fld id="{241EB5C9-1307-BA42-ABA2-0BC069CD8E7F}" type="datetimeFigureOut">
               <a:rPr lang="en-US" smtClean="0"/>
-              <a:t>6/25/2025</a:t>
+              <a:t>6/25/25</a:t>
             </a:fld>
             <a:endParaRPr lang="en-US"/>
           </a:p>
@@ -12939,7 +12939,7 @@
           <a:p>
             <a:fld id="{241EB5C9-1307-BA42-ABA2-0BC069CD8E7F}" type="datetimeFigureOut">
               <a:rPr lang="en-US" smtClean="0"/>
-              <a:t>6/25/2025</a:t>
+              <a:t>6/25/25</a:t>
             </a:fld>
             <a:endParaRPr lang="en-US"/>
           </a:p>
@@ -13224,7 +13224,7 @@
           <a:p>
             <a:fld id="{241EB5C9-1307-BA42-ABA2-0BC069CD8E7F}" type="datetimeFigureOut">
               <a:rPr lang="en-US" smtClean="0"/>
-              <a:t>6/25/2025</a:t>
+              <a:t>6/25/25</a:t>
             </a:fld>
             <a:endParaRPr lang="en-US"/>
           </a:p>
@@ -13643,7 +13643,7 @@
           <a:p>
             <a:fld id="{241EB5C9-1307-BA42-ABA2-0BC069CD8E7F}" type="datetimeFigureOut">
               <a:rPr lang="en-US" smtClean="0"/>
-              <a:t>6/25/2025</a:t>
+              <a:t>6/25/25</a:t>
             </a:fld>
             <a:endParaRPr lang="en-US"/>
           </a:p>
@@ -13760,7 +13760,7 @@
           <a:p>
             <a:fld id="{241EB5C9-1307-BA42-ABA2-0BC069CD8E7F}" type="datetimeFigureOut">
               <a:rPr lang="en-US" smtClean="0"/>
-              <a:t>6/25/2025</a:t>
+              <a:t>6/25/25</a:t>
             </a:fld>
             <a:endParaRPr lang="en-US"/>
           </a:p>
@@ -13855,7 +13855,7 @@
           <a:p>
             <a:fld id="{241EB5C9-1307-BA42-ABA2-0BC069CD8E7F}" type="datetimeFigureOut">
               <a:rPr lang="en-US" smtClean="0"/>
-              <a:t>6/25/2025</a:t>
+              <a:t>6/25/25</a:t>
             </a:fld>
             <a:endParaRPr lang="en-US"/>
           </a:p>
@@ -14130,7 +14130,7 @@
           <a:p>
             <a:fld id="{241EB5C9-1307-BA42-ABA2-0BC069CD8E7F}" type="datetimeFigureOut">
               <a:rPr lang="en-US" smtClean="0"/>
-              <a:t>6/25/2025</a:t>
+              <a:t>6/25/25</a:t>
             </a:fld>
             <a:endParaRPr lang="en-US"/>
           </a:p>
@@ -14382,7 +14382,7 @@
           <a:p>
             <a:fld id="{241EB5C9-1307-BA42-ABA2-0BC069CD8E7F}" type="datetimeFigureOut">
               <a:rPr lang="en-US" smtClean="0"/>
-              <a:t>6/25/2025</a:t>
+              <a:t>6/25/25</a:t>
             </a:fld>
             <a:endParaRPr lang="en-US"/>
           </a:p>
@@ -14593,7 +14593,7 @@
           <a:p>
             <a:fld id="{241EB5C9-1307-BA42-ABA2-0BC069CD8E7F}" type="datetimeFigureOut">
               <a:rPr lang="en-US" smtClean="0"/>
-              <a:t>6/25/2025</a:t>
+              <a:t>6/25/25</a:t>
             </a:fld>
             <a:endParaRPr lang="en-US"/>
           </a:p>
@@ -16340,12 +16340,12 @@
               <a:buNone/>
             </a:pPr>
             <a:r>
-              <a:rPr lang="en-US" sz="3000">
+              <a:rPr lang="en-US" sz="3000" dirty="0">
                 <a:solidFill>
                   <a:srgbClr val="FFFFFF"/>
                 </a:solidFill>
               </a:rPr>
-              <a:t>Data Sources and Storage</a:t>
+              <a:t>Data Sources</a:t>
             </a:r>
           </a:p>
         </p:txBody>
@@ -16366,7 +16366,7 @@
             <p:ph idx="1"/>
             <p:extLst>
               <p:ext uri="{D42A27DB-BD31-4B8C-83A1-F6EECF244321}">
-                <p14:modId xmlns:p14="http://schemas.microsoft.com/office/powerpoint/2010/main" val="3074410047"/>
+                <p14:modId xmlns:p14="http://schemas.microsoft.com/office/powerpoint/2010/main" val="771382006"/>
               </p:ext>
             </p:extLst>
           </p:nvPr>
@@ -17564,81 +17564,6 @@
           </a:p>
         </p:txBody>
       </p:sp>
-      <p:sp>
-        <p:nvSpPr>
-          <p:cNvPr id="3" name="Content Placeholder 2"/>
-          <p:cNvSpPr>
-            <a:spLocks noGrp="1"/>
-          </p:cNvSpPr>
-          <p:nvPr>
-            <p:ph idx="1"/>
-          </p:nvPr>
-        </p:nvSpPr>
-        <p:spPr>
-          <a:xfrm>
-            <a:off x="6241559" y="293124"/>
-            <a:ext cx="2720957" cy="655209"/>
-          </a:xfrm>
-        </p:spPr>
-        <p:txBody>
-          <a:bodyPr vert="horz" lIns="91440" tIns="45720" rIns="91440" bIns="45720" rtlCol="0" anchor="ctr">
-            <a:normAutofit/>
-          </a:bodyPr>
-          <a:lstStyle/>
-          <a:p>
-            <a:pPr marL="0" lvl="0" indent="0" defTabSz="914400">
-              <a:lnSpc>
-                <a:spcPct val="90000"/>
-              </a:lnSpc>
-              <a:spcBef>
-                <a:spcPts val="1000"/>
-              </a:spcBef>
-              <a:buNone/>
-            </a:pPr>
-            <a:r>
-              <a:rPr lang="en-US" sz="1300" kern="1200" dirty="0">
-                <a:solidFill>
-                  <a:srgbClr val="FFFFFF"/>
-                </a:solidFill>
-                <a:latin typeface="+mn-lt"/>
-                <a:ea typeface="+mn-ea"/>
-                <a:cs typeface="+mn-cs"/>
-              </a:rPr>
-              <a:t>https://cawaterdatadive.shinyapps.io</a:t>
-            </a:r>
-            <a:br>
-              <a:rPr lang="en-US" sz="1300" kern="1200" dirty="0">
-                <a:solidFill>
-                  <a:srgbClr val="FFFFFF"/>
-                </a:solidFill>
-                <a:latin typeface="+mn-lt"/>
-                <a:ea typeface="+mn-ea"/>
-                <a:cs typeface="+mn-cs"/>
-              </a:rPr>
-            </a:br>
-            <a:r>
-              <a:rPr lang="en-US" sz="1300" kern="1200" dirty="0">
-                <a:solidFill>
-                  <a:srgbClr val="FFFFFF"/>
-                </a:solidFill>
-                <a:latin typeface="+mn-lt"/>
-                <a:ea typeface="+mn-ea"/>
-                <a:cs typeface="+mn-cs"/>
-              </a:rPr>
-              <a:t>/scott-shasta-flow-dashboard/</a:t>
-            </a:r>
-            <a:endParaRPr lang="en-US" sz="1300" kern="1200" dirty="0">
-              <a:solidFill>
-                <a:srgbClr val="FFFFFF"/>
-              </a:solidFill>
-              <a:latin typeface="+mn-lt"/>
-              <a:ea typeface="+mn-ea"/>
-              <a:cs typeface="+mn-cs"/>
-              <a:hlinkClick r:id="rId2"/>
-            </a:endParaRPr>
-          </a:p>
-        </p:txBody>
-      </p:sp>
       <p:pic>
         <p:nvPicPr>
           <p:cNvPr id="5" name="Picture 4" descr="A qr code on a white background&#10;&#10;AI-generated content may be incorrect.">
@@ -17654,19 +17579,129 @@
           <p:nvPr/>
         </p:nvPicPr>
         <p:blipFill>
-          <a:blip r:embed="rId3"/>
+          <a:blip r:embed="rId2"/>
           <a:stretch>
             <a:fillRect/>
           </a:stretch>
         </p:blipFill>
         <p:spPr>
           <a:xfrm>
-            <a:off x="2902439" y="1474719"/>
-            <a:ext cx="3339120" cy="3339120"/>
+            <a:off x="2708517" y="1416724"/>
+            <a:ext cx="3726962" cy="3726962"/>
           </a:xfrm>
           <a:prstGeom prst="rect">
             <a:avLst/>
           </a:prstGeom>
+        </p:spPr>
+      </p:pic>
+      <p:sp>
+        <p:nvSpPr>
+          <p:cNvPr id="6" name="Content Placeholder 5">
+            <a:extLst>
+              <a:ext uri="{FF2B5EF4-FFF2-40B4-BE49-F238E27FC236}">
+                <a16:creationId xmlns:a16="http://schemas.microsoft.com/office/drawing/2014/main" id="{D9805D94-36BD-C2D7-F6C9-5A4307CD9E56}"/>
+              </a:ext>
+            </a:extLst>
+          </p:cNvPr>
+          <p:cNvSpPr>
+            <a:spLocks noGrp="1"/>
+          </p:cNvSpPr>
+          <p:nvPr>
+            <p:ph idx="1"/>
+          </p:nvPr>
+        </p:nvSpPr>
+        <p:spPr/>
+        <p:txBody>
+          <a:bodyPr>
+            <a:normAutofit/>
+          </a:bodyPr>
+          <a:lstStyle/>
+          <a:p>
+            <a:r>
+              <a:rPr lang="en-US" sz="1800" dirty="0"/>
+              <a:t>https://</a:t>
+            </a:r>
+            <a:r>
+              <a:rPr lang="en-US" sz="1800" dirty="0" err="1"/>
+              <a:t>cawaterdatadive.shinyapps.io</a:t>
+            </a:r>
+            <a:r>
+              <a:rPr lang="en-US" sz="1800" dirty="0"/>
+              <a:t>/</a:t>
+            </a:r>
+            <a:r>
+              <a:rPr lang="en-US" sz="1800" dirty="0" err="1"/>
+              <a:t>scott</a:t>
+            </a:r>
+            <a:r>
+              <a:rPr lang="en-US" sz="1800" dirty="0"/>
+              <a:t>-</a:t>
+            </a:r>
+            <a:r>
+              <a:rPr lang="en-US" sz="1800" dirty="0" err="1"/>
+              <a:t>shasta</a:t>
+            </a:r>
+            <a:r>
+              <a:rPr lang="en-US" sz="1800" dirty="0"/>
+              <a:t>-flow-dashboard/</a:t>
+            </a:r>
+            <a:endParaRPr lang="en-US" sz="1800" dirty="0">
+              <a:hlinkClick r:id="rId3">
+                <a:extLst>
+                  <a:ext uri="{A12FA001-AC4F-418D-AE19-62706E023703}">
+                    <ahyp:hlinkClr xmlns:ahyp="http://schemas.microsoft.com/office/drawing/2018/hyperlinkcolor" val="tx"/>
+                  </a:ext>
+                </a:extLst>
+              </a:hlinkClick>
+            </a:endParaRPr>
+          </a:p>
+        </p:txBody>
+      </p:sp>
+      <p:pic>
+        <p:nvPicPr>
+          <p:cNvPr id="2056" name="Picture 8">
+            <a:extLst>
+              <a:ext uri="{FF2B5EF4-FFF2-40B4-BE49-F238E27FC236}">
+                <a16:creationId xmlns:a16="http://schemas.microsoft.com/office/drawing/2014/main" id="{63845767-F5CE-A490-E559-BE3E1CDD5AC0}"/>
+              </a:ext>
+            </a:extLst>
+          </p:cNvPr>
+          <p:cNvPicPr>
+            <a:picLocks noChangeAspect="1" noChangeArrowheads="1"/>
+          </p:cNvPicPr>
+          <p:nvPr/>
+        </p:nvPicPr>
+        <p:blipFill>
+          <a:blip r:embed="rId4">
+            <a:extLst>
+              <a:ext uri="{28A0092B-C50C-407E-A947-70E740481C1C}">
+                <a14:useLocalDpi xmlns:a14="http://schemas.microsoft.com/office/drawing/2010/main" val="0"/>
+              </a:ext>
+            </a:extLst>
+          </a:blip>
+          <a:srcRect/>
+          <a:stretch>
+            <a:fillRect/>
+          </a:stretch>
+        </p:blipFill>
+        <p:spPr bwMode="auto">
+          <a:xfrm>
+            <a:off x="6279835" y="142595"/>
+            <a:ext cx="2680970" cy="886317"/>
+          </a:xfrm>
+          <a:prstGeom prst="rect">
+            <a:avLst/>
+          </a:prstGeom>
+          <a:noFill/>
+          <a:extLst>
+            <a:ext uri="{909E8E84-426E-40DD-AFC4-6F175D3DCCD1}">
+              <a14:hiddenFill xmlns:a14="http://schemas.microsoft.com/office/drawing/2010/main">
+                <a:solidFill>
+                  <a:srgbClr val="FFFFFF"/>
+                </a:solidFill>
+              </a14:hiddenFill>
+            </a:ext>
+          </a:extLst>
         </p:spPr>
       </p:pic>
     </p:spTree>
@@ -18060,10 +18095,57 @@
       </p:sp>
       <p:pic>
         <p:nvPicPr>
-          <p:cNvPr id="5" name="Picture 4" descr="A qr code on a white background&#10;&#10;AI-generated content may be incorrect.">
+          <p:cNvPr id="1032" name="Picture 8">
             <a:extLst>
               <a:ext uri="{FF2B5EF4-FFF2-40B4-BE49-F238E27FC236}">
-                <a16:creationId xmlns:a16="http://schemas.microsoft.com/office/drawing/2014/main" id="{B2F424F3-89F1-4467-97B7-A1BEF12E8673}"/>
+                <a16:creationId xmlns:a16="http://schemas.microsoft.com/office/drawing/2014/main" id="{EAC1AA6D-8A9C-66D4-D77B-B2E02677B8B0}"/>
+              </a:ext>
+            </a:extLst>
+          </p:cNvPr>
+          <p:cNvPicPr>
+            <a:picLocks noChangeAspect="1" noChangeArrowheads="1"/>
+          </p:cNvPicPr>
+          <p:nvPr/>
+        </p:nvPicPr>
+        <p:blipFill>
+          <a:blip r:embed="rId2">
+            <a:extLst>
+              <a:ext uri="{28A0092B-C50C-407E-A947-70E740481C1C}">
+                <a14:useLocalDpi xmlns:a14="http://schemas.microsoft.com/office/drawing/2010/main" val="0"/>
+              </a:ext>
+            </a:extLst>
+          </a:blip>
+          <a:srcRect/>
+          <a:stretch>
+            <a:fillRect/>
+          </a:stretch>
+        </p:blipFill>
+        <p:spPr bwMode="auto">
+          <a:xfrm>
+            <a:off x="7100913" y="93014"/>
+            <a:ext cx="1038815" cy="1055428"/>
+          </a:xfrm>
+          <a:prstGeom prst="rect">
+            <a:avLst/>
+          </a:prstGeom>
+          <a:noFill/>
+          <a:extLst>
+            <a:ext uri="{909E8E84-426E-40DD-AFC4-6F175D3DCCD1}">
+              <a14:hiddenFill xmlns:a14="http://schemas.microsoft.com/office/drawing/2010/main">
+                <a:solidFill>
+                  <a:srgbClr val="FFFFFF"/>
+                </a:solidFill>
+              </a14:hiddenFill>
+            </a:ext>
+          </a:extLst>
+        </p:spPr>
+      </p:pic>
+      <p:pic>
+        <p:nvPicPr>
+          <p:cNvPr id="7" name="Picture 6" descr="A qr code with black squares&#10;&#10;AI-generated content may be incorrect.">
+            <a:extLst>
+              <a:ext uri="{FF2B5EF4-FFF2-40B4-BE49-F238E27FC236}">
+                <a16:creationId xmlns:a16="http://schemas.microsoft.com/office/drawing/2014/main" id="{209203BE-69A6-FA62-B71F-88A1AC482F3A}"/>
               </a:ext>
             </a:extLst>
           </p:cNvPr>
@@ -18073,21 +18155,84 @@
           <p:nvPr/>
         </p:nvPicPr>
         <p:blipFill>
-          <a:blip r:embed="rId2"/>
+          <a:blip r:embed="rId3"/>
           <a:stretch>
             <a:fillRect/>
           </a:stretch>
         </p:blipFill>
         <p:spPr>
           <a:xfrm>
-            <a:off x="2902439" y="1474719"/>
-            <a:ext cx="3339120" cy="3339120"/>
+            <a:off x="2967607" y="1920077"/>
+            <a:ext cx="3208782" cy="3208782"/>
           </a:xfrm>
           <a:prstGeom prst="rect">
             <a:avLst/>
           </a:prstGeom>
         </p:spPr>
       </p:pic>
+      <p:sp>
+        <p:nvSpPr>
+          <p:cNvPr id="8" name="TextBox 7">
+            <a:extLst>
+              <a:ext uri="{FF2B5EF4-FFF2-40B4-BE49-F238E27FC236}">
+                <a16:creationId xmlns:a16="http://schemas.microsoft.com/office/drawing/2014/main" id="{9C50B371-5B42-6B51-55AF-6D183364DB7B}"/>
+              </a:ext>
+            </a:extLst>
+          </p:cNvPr>
+          <p:cNvSpPr txBox="1"/>
+          <p:nvPr/>
+        </p:nvSpPr>
+        <p:spPr>
+          <a:xfrm>
+            <a:off x="555585" y="1273746"/>
+            <a:ext cx="7531485" cy="723275"/>
+          </a:xfrm>
+          <a:prstGeom prst="rect">
+            <a:avLst/>
+          </a:prstGeom>
+          <a:noFill/>
+        </p:spPr>
+        <p:txBody>
+          <a:bodyPr wrap="none" rtlCol="0">
+            <a:spAutoFit/>
+          </a:bodyPr>
+          <a:lstStyle/>
+          <a:p>
+            <a:pPr marL="285750" indent="-285750">
+              <a:spcBef>
+                <a:spcPts val="600"/>
+              </a:spcBef>
+              <a:spcAft>
+                <a:spcPts val="600"/>
+              </a:spcAft>
+              <a:buFont typeface="Arial" panose="020B0604020202020204" pitchFamily="34" charset="0"/>
+              <a:buChar char="•"/>
+            </a:pPr>
+            <a:r>
+              <a:rPr lang="en-US" dirty="0"/>
+              <a:t>https://github.com/CAWaterBoardDataCenter/scott-shasta-flow-dashboard</a:t>
+            </a:r>
+          </a:p>
+          <a:p>
+            <a:pPr marL="285750" indent="-285750">
+              <a:buFont typeface="Arial" panose="020B0604020202020204" pitchFamily="34" charset="0"/>
+              <a:buChar char="•"/>
+            </a:pPr>
+            <a:r>
+              <a:rPr lang="en-US" dirty="0"/>
+              <a:t>Does </a:t>
+            </a:r>
+            <a:r>
+              <a:rPr lang="en-US"/>
+              <a:t>not contain aws</a:t>
+            </a:r>
+            <a:r>
+              <a:rPr lang="en-US" dirty="0"/>
+              <a:t>-data folder (PII)</a:t>
+            </a:r>
+          </a:p>
+        </p:txBody>
+      </p:sp>
     </p:spTree>
     <p:extLst>
       <p:ext uri="{BB962C8B-B14F-4D97-AF65-F5344CB8AC3E}">

--- a/presentation/scott-shasta-presentation-final.pptx
+++ b/presentation/scott-shasta-presentation-final.pptx
@@ -18220,11 +18220,11 @@
             </a:pPr>
             <a:r>
               <a:rPr lang="en-US" dirty="0"/>
-              <a:t>Does </a:t>
+              <a:t>Does not contain </a:t>
             </a:r>
             <a:r>
-              <a:rPr lang="en-US"/>
-              <a:t>not contain aws</a:t>
+              <a:rPr lang="en-US" dirty="0" err="1"/>
+              <a:t>aws</a:t>
             </a:r>
             <a:r>
               <a:rPr lang="en-US" dirty="0"/>
